--- a/Novosibirsk_State_University/Дипломная работа/Зачет.pptx
+++ b/Novosibirsk_State_University/Дипломная работа/Зачет.pptx
@@ -6300,37 +6300,32 @@
       </p:sp>
       <p:pic>
         <p:nvPicPr>
-          <p:cNvPr id="16" name="Объект 15">
-            <a:extLst>
-              <a:ext uri="{FF2B5EF4-FFF2-40B4-BE49-F238E27FC236}">
-                <a16:creationId xmlns:a16="http://schemas.microsoft.com/office/drawing/2014/main" id="{07455FF4-B258-46ED-9D42-DB4282727F00}"/>
+          <p:cNvPr id="6" name="Рисунок 5">
+            <a:extLst>
+              <a:ext uri="{FF2B5EF4-FFF2-40B4-BE49-F238E27FC236}">
+                <a16:creationId xmlns:a16="http://schemas.microsoft.com/office/drawing/2014/main" id="{5B8ADDAA-2479-4350-A30D-C7CDC8EB9F7A}"/>
               </a:ext>
             </a:extLst>
           </p:cNvPr>
           <p:cNvPicPr>
-            <a:picLocks noGrp="1" noChangeAspect="1"/>
+            <a:picLocks noChangeAspect="1"/>
           </p:cNvPicPr>
-          <p:nvPr>
-            <p:ph idx="1"/>
-          </p:nvPr>
+          <p:nvPr/>
         </p:nvPicPr>
         <p:blipFill>
-          <a:blip r:embed="rId6">
-            <a:extLst>
-              <a:ext uri="{28A0092B-C50C-407E-A947-70E740481C1C}">
-                <a14:useLocalDpi xmlns:a14="http://schemas.microsoft.com/office/drawing/2010/main" val="0"/>
-              </a:ext>
-            </a:extLst>
-          </a:blip>
+          <a:blip r:embed="rId6"/>
           <a:stretch>
             <a:fillRect/>
           </a:stretch>
         </p:blipFill>
         <p:spPr>
           <a:xfrm>
-            <a:off x="7740150" y="2208141"/>
+            <a:off x="7739073" y="2208141"/>
             <a:ext cx="4163855" cy="2880000"/>
           </a:xfrm>
+          <a:prstGeom prst="rect">
+            <a:avLst/>
+          </a:prstGeom>
         </p:spPr>
       </p:pic>
     </p:spTree>

--- a/Novosibirsk_State_University/Дипломная работа/Зачет.pptx
+++ b/Novosibirsk_State_University/Дипломная работа/Зачет.pptx
@@ -12,11 +12,12 @@
     <p:sldId id="266" r:id="rId6"/>
     <p:sldId id="268" r:id="rId7"/>
     <p:sldId id="269" r:id="rId8"/>
-    <p:sldId id="270" r:id="rId9"/>
-    <p:sldId id="271" r:id="rId10"/>
-    <p:sldId id="272" r:id="rId11"/>
-    <p:sldId id="265" r:id="rId12"/>
-    <p:sldId id="258" r:id="rId13"/>
+    <p:sldId id="274" r:id="rId9"/>
+    <p:sldId id="270" r:id="rId10"/>
+    <p:sldId id="271" r:id="rId11"/>
+    <p:sldId id="272" r:id="rId12"/>
+    <p:sldId id="265" r:id="rId13"/>
+    <p:sldId id="273" r:id="rId14"/>
   </p:sldIdLst>
   <p:sldSz cx="12192000" cy="6858000"/>
   <p:notesSz cx="6858000" cy="9144000"/>
@@ -282,7 +283,7 @@
           <a:p>
             <a:fld id="{0EA0B553-31EF-4B1D-9EAB-410AD6CA89D0}" type="datetimeFigureOut">
               <a:rPr lang="ru-RU" smtClean="0"/>
-              <a:t>18.12.2025</a:t>
+              <a:t>23.12.2025</a:t>
             </a:fld>
             <a:endParaRPr lang="ru-RU"/>
           </a:p>
@@ -480,7 +481,7 @@
           <a:p>
             <a:fld id="{0EA0B553-31EF-4B1D-9EAB-410AD6CA89D0}" type="datetimeFigureOut">
               <a:rPr lang="ru-RU" smtClean="0"/>
-              <a:t>18.12.2025</a:t>
+              <a:t>23.12.2025</a:t>
             </a:fld>
             <a:endParaRPr lang="ru-RU"/>
           </a:p>
@@ -688,7 +689,7 @@
           <a:p>
             <a:fld id="{0EA0B553-31EF-4B1D-9EAB-410AD6CA89D0}" type="datetimeFigureOut">
               <a:rPr lang="ru-RU" smtClean="0"/>
-              <a:t>18.12.2025</a:t>
+              <a:t>23.12.2025</a:t>
             </a:fld>
             <a:endParaRPr lang="ru-RU"/>
           </a:p>
@@ -886,7 +887,7 @@
           <a:p>
             <a:fld id="{0EA0B553-31EF-4B1D-9EAB-410AD6CA89D0}" type="datetimeFigureOut">
               <a:rPr lang="ru-RU" smtClean="0"/>
-              <a:t>18.12.2025</a:t>
+              <a:t>23.12.2025</a:t>
             </a:fld>
             <a:endParaRPr lang="ru-RU"/>
           </a:p>
@@ -1161,7 +1162,7 @@
           <a:p>
             <a:fld id="{0EA0B553-31EF-4B1D-9EAB-410AD6CA89D0}" type="datetimeFigureOut">
               <a:rPr lang="ru-RU" smtClean="0"/>
-              <a:t>18.12.2025</a:t>
+              <a:t>23.12.2025</a:t>
             </a:fld>
             <a:endParaRPr lang="ru-RU"/>
           </a:p>
@@ -1426,7 +1427,7 @@
           <a:p>
             <a:fld id="{0EA0B553-31EF-4B1D-9EAB-410AD6CA89D0}" type="datetimeFigureOut">
               <a:rPr lang="ru-RU" smtClean="0"/>
-              <a:t>18.12.2025</a:t>
+              <a:t>23.12.2025</a:t>
             </a:fld>
             <a:endParaRPr lang="ru-RU"/>
           </a:p>
@@ -1838,7 +1839,7 @@
           <a:p>
             <a:fld id="{0EA0B553-31EF-4B1D-9EAB-410AD6CA89D0}" type="datetimeFigureOut">
               <a:rPr lang="ru-RU" smtClean="0"/>
-              <a:t>18.12.2025</a:t>
+              <a:t>23.12.2025</a:t>
             </a:fld>
             <a:endParaRPr lang="ru-RU"/>
           </a:p>
@@ -1979,7 +1980,7 @@
           <a:p>
             <a:fld id="{0EA0B553-31EF-4B1D-9EAB-410AD6CA89D0}" type="datetimeFigureOut">
               <a:rPr lang="ru-RU" smtClean="0"/>
-              <a:t>18.12.2025</a:t>
+              <a:t>23.12.2025</a:t>
             </a:fld>
             <a:endParaRPr lang="ru-RU"/>
           </a:p>
@@ -2092,7 +2093,7 @@
           <a:p>
             <a:fld id="{0EA0B553-31EF-4B1D-9EAB-410AD6CA89D0}" type="datetimeFigureOut">
               <a:rPr lang="ru-RU" smtClean="0"/>
-              <a:t>18.12.2025</a:t>
+              <a:t>23.12.2025</a:t>
             </a:fld>
             <a:endParaRPr lang="ru-RU"/>
           </a:p>
@@ -2403,7 +2404,7 @@
           <a:p>
             <a:fld id="{0EA0B553-31EF-4B1D-9EAB-410AD6CA89D0}" type="datetimeFigureOut">
               <a:rPr lang="ru-RU" smtClean="0"/>
-              <a:t>18.12.2025</a:t>
+              <a:t>23.12.2025</a:t>
             </a:fld>
             <a:endParaRPr lang="ru-RU"/>
           </a:p>
@@ -2691,7 +2692,7 @@
           <a:p>
             <a:fld id="{0EA0B553-31EF-4B1D-9EAB-410AD6CA89D0}" type="datetimeFigureOut">
               <a:rPr lang="ru-RU" smtClean="0"/>
-              <a:t>18.12.2025</a:t>
+              <a:t>23.12.2025</a:t>
             </a:fld>
             <a:endParaRPr lang="ru-RU"/>
           </a:p>
@@ -2932,7 +2933,7 @@
           <a:p>
             <a:fld id="{0EA0B553-31EF-4B1D-9EAB-410AD6CA89D0}" type="datetimeFigureOut">
               <a:rPr lang="ru-RU" smtClean="0"/>
-              <a:t>18.12.2025</a:t>
+              <a:t>23.12.2025</a:t>
             </a:fld>
             <a:endParaRPr lang="ru-RU"/>
           </a:p>
@@ -3534,7 +3535,7 @@
                 <a:latin typeface="Times New Roman" panose="02020603050405020304" pitchFamily="18" charset="0"/>
                 <a:cs typeface="Times New Roman" panose="02020603050405020304" pitchFamily="18" charset="0"/>
               </a:rPr>
-              <a:t>Место:</a:t>
+              <a:t>Место прохождения практики:</a:t>
             </a:r>
             <a:r>
               <a:rPr lang="ru-RU" sz="1800" spc="150" dirty="0">
@@ -3675,6 +3676,249 @@
                 <a:latin typeface="Times New Roman" panose="02020603050405020304" pitchFamily="18" charset="0"/>
                 <a:cs typeface="Times New Roman" panose="02020603050405020304" pitchFamily="18" charset="0"/>
               </a:rPr>
+              <a:t>Ход работы</a:t>
+            </a:r>
+          </a:p>
+        </p:txBody>
+      </p:sp>
+      <p:pic>
+        <p:nvPicPr>
+          <p:cNvPr id="5" name="Рисунок 4">
+            <a:extLst>
+              <a:ext uri="{FF2B5EF4-FFF2-40B4-BE49-F238E27FC236}">
+                <a16:creationId xmlns:a16="http://schemas.microsoft.com/office/drawing/2014/main" id="{A03E2CFB-5BC8-4F81-9D4B-F02C07E62FA1}"/>
+              </a:ext>
+            </a:extLst>
+          </p:cNvPr>
+          <p:cNvPicPr>
+            <a:picLocks noChangeAspect="1"/>
+          </p:cNvPicPr>
+          <p:nvPr/>
+        </p:nvPicPr>
+        <p:blipFill>
+          <a:blip r:embed="rId2"/>
+          <a:stretch>
+            <a:fillRect/>
+          </a:stretch>
+        </p:blipFill>
+        <p:spPr>
+          <a:xfrm>
+            <a:off x="1066049" y="1147483"/>
+            <a:ext cx="4690475" cy="2520000"/>
+          </a:xfrm>
+          <a:prstGeom prst="rect">
+            <a:avLst/>
+          </a:prstGeom>
+          <a:ln w="38100" cap="sq">
+            <a:solidFill>
+              <a:srgbClr val="000000"/>
+            </a:solidFill>
+            <a:prstDash val="solid"/>
+            <a:miter lim="800000"/>
+          </a:ln>
+          <a:effectLst>
+            <a:outerShdw blurRad="50800" dist="38100" dir="2700000" algn="tl" rotWithShape="0">
+              <a:srgbClr val="000000">
+                <a:alpha val="43000"/>
+              </a:srgbClr>
+            </a:outerShdw>
+          </a:effectLst>
+        </p:spPr>
+      </p:pic>
+      <p:pic>
+        <p:nvPicPr>
+          <p:cNvPr id="7" name="Рисунок 6">
+            <a:extLst>
+              <a:ext uri="{FF2B5EF4-FFF2-40B4-BE49-F238E27FC236}">
+                <a16:creationId xmlns:a16="http://schemas.microsoft.com/office/drawing/2014/main" id="{6D23315C-8388-4183-B87B-DA1544DB9EC4}"/>
+              </a:ext>
+            </a:extLst>
+          </p:cNvPr>
+          <p:cNvPicPr>
+            <a:picLocks noChangeAspect="1"/>
+          </p:cNvPicPr>
+          <p:nvPr/>
+        </p:nvPicPr>
+        <p:blipFill>
+          <a:blip r:embed="rId3"/>
+          <a:stretch>
+            <a:fillRect/>
+          </a:stretch>
+        </p:blipFill>
+        <p:spPr>
+          <a:xfrm>
+            <a:off x="6435477" y="1147483"/>
+            <a:ext cx="4695030" cy="2520000"/>
+          </a:xfrm>
+          <a:prstGeom prst="rect">
+            <a:avLst/>
+          </a:prstGeom>
+          <a:ln w="38100" cap="sq">
+            <a:solidFill>
+              <a:srgbClr val="000000"/>
+            </a:solidFill>
+            <a:prstDash val="solid"/>
+            <a:miter lim="800000"/>
+          </a:ln>
+          <a:effectLst>
+            <a:outerShdw blurRad="50800" dist="38100" dir="2700000" algn="tl" rotWithShape="0">
+              <a:srgbClr val="000000">
+                <a:alpha val="43000"/>
+              </a:srgbClr>
+            </a:outerShdw>
+          </a:effectLst>
+        </p:spPr>
+      </p:pic>
+      <p:pic>
+        <p:nvPicPr>
+          <p:cNvPr id="9" name="Рисунок 8">
+            <a:extLst>
+              <a:ext uri="{FF2B5EF4-FFF2-40B4-BE49-F238E27FC236}">
+                <a16:creationId xmlns:a16="http://schemas.microsoft.com/office/drawing/2014/main" id="{13F3C681-CC96-4228-A404-74665FCA058D}"/>
+              </a:ext>
+            </a:extLst>
+          </p:cNvPr>
+          <p:cNvPicPr>
+            <a:picLocks noChangeAspect="1"/>
+          </p:cNvPicPr>
+          <p:nvPr/>
+        </p:nvPicPr>
+        <p:blipFill>
+          <a:blip r:embed="rId4"/>
+          <a:stretch>
+            <a:fillRect/>
+          </a:stretch>
+        </p:blipFill>
+        <p:spPr>
+          <a:xfrm>
+            <a:off x="6435477" y="4015270"/>
+            <a:ext cx="4695030" cy="2520000"/>
+          </a:xfrm>
+          <a:prstGeom prst="rect">
+            <a:avLst/>
+          </a:prstGeom>
+          <a:ln w="38100" cap="sq">
+            <a:solidFill>
+              <a:srgbClr val="000000"/>
+            </a:solidFill>
+            <a:prstDash val="solid"/>
+            <a:miter lim="800000"/>
+          </a:ln>
+          <a:effectLst>
+            <a:outerShdw blurRad="50800" dist="38100" dir="2700000" algn="tl" rotWithShape="0">
+              <a:srgbClr val="000000">
+                <a:alpha val="43000"/>
+              </a:srgbClr>
+            </a:outerShdw>
+          </a:effectLst>
+        </p:spPr>
+      </p:pic>
+      <p:pic>
+        <p:nvPicPr>
+          <p:cNvPr id="11" name="Рисунок 10">
+            <a:extLst>
+              <a:ext uri="{FF2B5EF4-FFF2-40B4-BE49-F238E27FC236}">
+                <a16:creationId xmlns:a16="http://schemas.microsoft.com/office/drawing/2014/main" id="{C414E3A1-9A02-4A3C-A3DF-E4DC824681DF}"/>
+              </a:ext>
+            </a:extLst>
+          </p:cNvPr>
+          <p:cNvPicPr>
+            <a:picLocks noChangeAspect="1"/>
+          </p:cNvPicPr>
+          <p:nvPr/>
+        </p:nvPicPr>
+        <p:blipFill>
+          <a:blip r:embed="rId5"/>
+          <a:stretch>
+            <a:fillRect/>
+          </a:stretch>
+        </p:blipFill>
+        <p:spPr>
+          <a:xfrm>
+            <a:off x="1066049" y="4015270"/>
+            <a:ext cx="4685242" cy="2520000"/>
+          </a:xfrm>
+          <a:prstGeom prst="rect">
+            <a:avLst/>
+          </a:prstGeom>
+          <a:ln w="38100" cap="sq">
+            <a:solidFill>
+              <a:srgbClr val="000000"/>
+            </a:solidFill>
+            <a:prstDash val="solid"/>
+            <a:miter lim="800000"/>
+          </a:ln>
+          <a:effectLst>
+            <a:outerShdw blurRad="50800" dist="38100" dir="2700000" algn="tl" rotWithShape="0">
+              <a:srgbClr val="000000">
+                <a:alpha val="43000"/>
+              </a:srgbClr>
+            </a:outerShdw>
+          </a:effectLst>
+        </p:spPr>
+      </p:pic>
+    </p:spTree>
+    <p:extLst>
+      <p:ext uri="{BB962C8B-B14F-4D97-AF65-F5344CB8AC3E}">
+        <p14:creationId xmlns:p14="http://schemas.microsoft.com/office/powerpoint/2010/main" val="3511736450"/>
+      </p:ext>
+    </p:extLst>
+  </p:cSld>
+  <p:clrMapOvr>
+    <a:masterClrMapping/>
+  </p:clrMapOvr>
+</p:sld>
+</file>
+
+<file path=ppt/slides/slide11.xml><?xml version="1.0" encoding="utf-8"?>
+<p:sld xmlns:a="http://schemas.openxmlformats.org/drawingml/2006/main" xmlns:r="http://schemas.openxmlformats.org/officeDocument/2006/relationships" xmlns:p="http://schemas.openxmlformats.org/presentationml/2006/main">
+  <p:cSld>
+    <p:spTree>
+      <p:nvGrpSpPr>
+        <p:cNvPr id="1" name=""/>
+        <p:cNvGrpSpPr/>
+        <p:nvPr/>
+      </p:nvGrpSpPr>
+      <p:grpSpPr>
+        <a:xfrm>
+          <a:off x="0" y="0"/>
+          <a:ext cx="0" cy="0"/>
+          <a:chOff x="0" y="0"/>
+          <a:chExt cx="0" cy="0"/>
+        </a:xfrm>
+      </p:grpSpPr>
+      <p:sp>
+        <p:nvSpPr>
+          <p:cNvPr id="2" name="Заголовок 1">
+            <a:extLst>
+              <a:ext uri="{FF2B5EF4-FFF2-40B4-BE49-F238E27FC236}">
+                <a16:creationId xmlns:a16="http://schemas.microsoft.com/office/drawing/2014/main" id="{EEC75D28-21D8-46FA-B239-E307DEF591CB}"/>
+              </a:ext>
+            </a:extLst>
+          </p:cNvPr>
+          <p:cNvSpPr>
+            <a:spLocks noGrp="1"/>
+          </p:cNvSpPr>
+          <p:nvPr>
+            <p:ph type="title"/>
+          </p:nvPr>
+        </p:nvSpPr>
+        <p:spPr>
+          <a:xfrm>
+            <a:off x="838200" y="170330"/>
+            <a:ext cx="10515600" cy="762000"/>
+          </a:xfrm>
+        </p:spPr>
+        <p:txBody>
+          <a:bodyPr/>
+          <a:lstStyle/>
+          <a:p>
+            <a:pPr algn="ctr"/>
+            <a:r>
+              <a:rPr lang="ru-RU" dirty="0">
+                <a:latin typeface="Times New Roman" panose="02020603050405020304" pitchFamily="18" charset="0"/>
+                <a:cs typeface="Times New Roman" panose="02020603050405020304" pitchFamily="18" charset="0"/>
+              </a:rPr>
               <a:t>Сравнение методов</a:t>
             </a:r>
           </a:p>
@@ -3696,7 +3940,7 @@
             <p:ph idx="1"/>
             <p:extLst>
               <p:ext uri="{D42A27DB-BD31-4B8C-83A1-F6EECF244321}">
-                <p14:modId xmlns:p14="http://schemas.microsoft.com/office/powerpoint/2010/main" val="961305596"/>
+                <p14:modId xmlns:p14="http://schemas.microsoft.com/office/powerpoint/2010/main" val="1538039399"/>
               </p:ext>
             </p:extLst>
           </p:nvPr>
@@ -3930,7 +4174,7 @@
                           <a:latin typeface="Times New Roman" panose="02020603050405020304" pitchFamily="18" charset="0"/>
                           <a:cs typeface="Times New Roman" panose="02020603050405020304" pitchFamily="18" charset="0"/>
                         </a:rPr>
-                        <a:t>Воспроизводимость (стандартное отклонение)</a:t>
+                        <a:t>Измерение энергии лазерного импульса</a:t>
                       </a:r>
                     </a:p>
                   </a:txBody>
@@ -3963,6 +4207,16 @@
                     <a:p>
                       <a:pPr algn="ctr"/>
                       <a:r>
+                        <a:rPr lang="en-US" sz="1200" dirty="0">
+                          <a:solidFill>
+                            <a:schemeClr val="tx1"/>
+                          </a:solidFill>
+                          <a:latin typeface="Times New Roman" panose="02020603050405020304" pitchFamily="18" charset="0"/>
+                          <a:cs typeface="Times New Roman" panose="02020603050405020304" pitchFamily="18" charset="0"/>
+                        </a:rPr>
+                        <a:t>4</a:t>
+                      </a:r>
+                      <a:r>
                         <a:rPr lang="ru-RU" sz="1200" dirty="0">
                           <a:solidFill>
                             <a:schemeClr val="tx1"/>
@@ -3970,7 +4224,27 @@
                           <a:latin typeface="Times New Roman" panose="02020603050405020304" pitchFamily="18" charset="0"/>
                           <a:cs typeface="Times New Roman" panose="02020603050405020304" pitchFamily="18" charset="0"/>
                         </a:rPr>
-                        <a:t>1.5-2.5%</a:t>
+                        <a:t>-</a:t>
+                      </a:r>
+                      <a:r>
+                        <a:rPr lang="en-US" sz="1200" dirty="0">
+                          <a:solidFill>
+                            <a:schemeClr val="tx1"/>
+                          </a:solidFill>
+                          <a:latin typeface="Times New Roman" panose="02020603050405020304" pitchFamily="18" charset="0"/>
+                          <a:cs typeface="Times New Roman" panose="02020603050405020304" pitchFamily="18" charset="0"/>
+                        </a:rPr>
+                        <a:t>6</a:t>
+                      </a:r>
+                      <a:r>
+                        <a:rPr lang="ru-RU" sz="1200" dirty="0">
+                          <a:solidFill>
+                            <a:schemeClr val="tx1"/>
+                          </a:solidFill>
+                          <a:latin typeface="Times New Roman" panose="02020603050405020304" pitchFamily="18" charset="0"/>
+                          <a:cs typeface="Times New Roman" panose="02020603050405020304" pitchFamily="18" charset="0"/>
+                        </a:rPr>
+                        <a:t>%</a:t>
                       </a:r>
                     </a:p>
                   </a:txBody>
@@ -3990,7 +4264,27 @@
                           <a:latin typeface="Times New Roman" panose="02020603050405020304" pitchFamily="18" charset="0"/>
                           <a:cs typeface="Times New Roman" panose="02020603050405020304" pitchFamily="18" charset="0"/>
                         </a:rPr>
-                        <a:t>В 4-6 раз точнее</a:t>
+                        <a:t>В </a:t>
+                      </a:r>
+                      <a:r>
+                        <a:rPr lang="en-US" sz="1200" dirty="0">
+                          <a:solidFill>
+                            <a:schemeClr val="tx1"/>
+                          </a:solidFill>
+                          <a:latin typeface="Times New Roman" panose="02020603050405020304" pitchFamily="18" charset="0"/>
+                          <a:cs typeface="Times New Roman" panose="02020603050405020304" pitchFamily="18" charset="0"/>
+                        </a:rPr>
+                        <a:t>2</a:t>
+                      </a:r>
+                      <a:r>
+                        <a:rPr lang="ru-RU" sz="1200" dirty="0">
+                          <a:solidFill>
+                            <a:schemeClr val="tx1"/>
+                          </a:solidFill>
+                          <a:latin typeface="Times New Roman" panose="02020603050405020304" pitchFamily="18" charset="0"/>
+                          <a:cs typeface="Times New Roman" panose="02020603050405020304" pitchFamily="18" charset="0"/>
+                        </a:rPr>
+                        <a:t>-3 раза точнее</a:t>
                       </a:r>
                     </a:p>
                   </a:txBody>
@@ -4255,7 +4549,7 @@
                           <a:latin typeface="Times New Roman" panose="02020603050405020304" pitchFamily="18" charset="0"/>
                           <a:cs typeface="Times New Roman" panose="02020603050405020304" pitchFamily="18" charset="0"/>
                         </a:rPr>
-                        <a:t>Excel/MATLAB</a:t>
+                        <a:t>Origin/MATLAB</a:t>
                       </a:r>
                       <a:endParaRPr lang="ru-RU" sz="1200" dirty="0">
                         <a:solidFill>
@@ -4331,150 +4625,6 @@
 </p:sld>
 </file>
 
-<file path=ppt/slides/slide11.xml><?xml version="1.0" encoding="utf-8"?>
-<p:sld xmlns:a="http://schemas.openxmlformats.org/drawingml/2006/main" xmlns:r="http://schemas.openxmlformats.org/officeDocument/2006/relationships" xmlns:p="http://schemas.openxmlformats.org/presentationml/2006/main">
-  <p:cSld>
-    <p:spTree>
-      <p:nvGrpSpPr>
-        <p:cNvPr id="1" name=""/>
-        <p:cNvGrpSpPr/>
-        <p:nvPr/>
-      </p:nvGrpSpPr>
-      <p:grpSpPr>
-        <a:xfrm>
-          <a:off x="0" y="0"/>
-          <a:ext cx="0" cy="0"/>
-          <a:chOff x="0" y="0"/>
-          <a:chExt cx="0" cy="0"/>
-        </a:xfrm>
-      </p:grpSpPr>
-      <p:sp>
-        <p:nvSpPr>
-          <p:cNvPr id="2" name="Заголовок 1">
-            <a:extLst>
-              <a:ext uri="{FF2B5EF4-FFF2-40B4-BE49-F238E27FC236}">
-                <a16:creationId xmlns:a16="http://schemas.microsoft.com/office/drawing/2014/main" id="{EEC75D28-21D8-46FA-B239-E307DEF591CB}"/>
-              </a:ext>
-            </a:extLst>
-          </p:cNvPr>
-          <p:cNvSpPr>
-            <a:spLocks noGrp="1"/>
-          </p:cNvSpPr>
-          <p:nvPr>
-            <p:ph type="title"/>
-          </p:nvPr>
-        </p:nvSpPr>
-        <p:spPr>
-          <a:xfrm>
-            <a:off x="838200" y="170330"/>
-            <a:ext cx="10515600" cy="762000"/>
-          </a:xfrm>
-        </p:spPr>
-        <p:txBody>
-          <a:bodyPr/>
-          <a:lstStyle/>
-          <a:p>
-            <a:pPr algn="ctr"/>
-            <a:r>
-              <a:rPr lang="ru-RU" dirty="0">
-                <a:latin typeface="Times New Roman" panose="02020603050405020304" pitchFamily="18" charset="0"/>
-                <a:cs typeface="Times New Roman" panose="02020603050405020304" pitchFamily="18" charset="0"/>
-              </a:rPr>
-              <a:t>Ожидаемые результаты</a:t>
-            </a:r>
-          </a:p>
-        </p:txBody>
-      </p:sp>
-      <p:sp>
-        <p:nvSpPr>
-          <p:cNvPr id="3" name="Объект 2">
-            <a:extLst>
-              <a:ext uri="{FF2B5EF4-FFF2-40B4-BE49-F238E27FC236}">
-                <a16:creationId xmlns:a16="http://schemas.microsoft.com/office/drawing/2014/main" id="{9F52EC69-9860-45E6-9E44-C311D1C19D5C}"/>
-              </a:ext>
-            </a:extLst>
-          </p:cNvPr>
-          <p:cNvSpPr>
-            <a:spLocks noGrp="1"/>
-          </p:cNvSpPr>
-          <p:nvPr>
-            <p:ph idx="1"/>
-          </p:nvPr>
-        </p:nvSpPr>
-        <p:spPr>
-          <a:xfrm>
-            <a:off x="838200" y="932330"/>
-            <a:ext cx="10515600" cy="5755340"/>
-          </a:xfrm>
-        </p:spPr>
-        <p:txBody>
-          <a:bodyPr anchor="ctr">
-            <a:normAutofit/>
-          </a:bodyPr>
-          <a:lstStyle/>
-          <a:p>
-            <a:pPr marL="0" indent="0">
-              <a:buNone/>
-            </a:pPr>
-            <a:r>
-              <a:rPr lang="ru-RU" dirty="0">
-                <a:latin typeface="Times New Roman" panose="02020603050405020304" pitchFamily="18" charset="0"/>
-                <a:cs typeface="Times New Roman" panose="02020603050405020304" pitchFamily="18" charset="0"/>
-              </a:rPr>
-              <a:t>1. Будет разработан и реализован в ПО формализованный алгоритм проведения экспериментов. Это позволит получать точнее и быстрее спектры ИК-люминесценции синглетного кислорода, в частности, спектры ИК-люминесценции синглетного кислорода от длины волны возбуждения лазерного импульса.</a:t>
-            </a:r>
-          </a:p>
-          <a:p>
-            <a:pPr marL="0" indent="0">
-              <a:buNone/>
-            </a:pPr>
-            <a:r>
-              <a:rPr lang="ru-RU" dirty="0">
-                <a:latin typeface="Times New Roman" panose="02020603050405020304" pitchFamily="18" charset="0"/>
-                <a:cs typeface="Times New Roman" panose="02020603050405020304" pitchFamily="18" charset="0"/>
-              </a:rPr>
-              <a:t>2. Будет разработано программное обеспечение, которое собирает данные с осциллографа и измерителя энергии и сразу проводит их обработку с помощью двух независимых методов для вычисления спектра и расчета зависимости энергии от интенсивности.</a:t>
-            </a:r>
-          </a:p>
-          <a:p>
-            <a:pPr marL="0" indent="0">
-              <a:buNone/>
-            </a:pPr>
-            <a:r>
-              <a:rPr lang="ru-RU" dirty="0">
-                <a:latin typeface="Times New Roman" panose="02020603050405020304" pitchFamily="18" charset="0"/>
-                <a:cs typeface="Times New Roman" panose="02020603050405020304" pitchFamily="18" charset="0"/>
-              </a:rPr>
-              <a:t>3. Будет реализована и протестирована встроенная процедура автоматической калибровки системы на эталонном веществе или светодиоде с известными спектральными характеристиками.</a:t>
-            </a:r>
-          </a:p>
-          <a:p>
-            <a:pPr marL="0" indent="0">
-              <a:buNone/>
-            </a:pPr>
-            <a:r>
-              <a:rPr lang="ru-RU" dirty="0">
-                <a:latin typeface="Times New Roman" panose="02020603050405020304" pitchFamily="18" charset="0"/>
-                <a:cs typeface="Times New Roman" panose="02020603050405020304" pitchFamily="18" charset="0"/>
-              </a:rPr>
-              <a:t>4. Будет протестировано ПО в реальных условиях эксперимента.</a:t>
-            </a:r>
-          </a:p>
-        </p:txBody>
-      </p:sp>
-    </p:spTree>
-    <p:extLst>
-      <p:ext uri="{BB962C8B-B14F-4D97-AF65-F5344CB8AC3E}">
-        <p14:creationId xmlns:p14="http://schemas.microsoft.com/office/powerpoint/2010/main" val="3292413976"/>
-      </p:ext>
-    </p:extLst>
-  </p:cSld>
-  <p:clrMapOvr>
-    <a:masterClrMapping/>
-  </p:clrMapOvr>
-</p:sld>
-</file>
-
 <file path=ppt/slides/slide12.xml><?xml version="1.0" encoding="utf-8"?>
 <p:sld xmlns:a="http://schemas.openxmlformats.org/drawingml/2006/main" xmlns:r="http://schemas.openxmlformats.org/officeDocument/2006/relationships" xmlns:p="http://schemas.openxmlformats.org/presentationml/2006/main">
   <p:cSld>
@@ -4497,6 +4647,150 @@
           <p:cNvPr id="2" name="Заголовок 1">
             <a:extLst>
               <a:ext uri="{FF2B5EF4-FFF2-40B4-BE49-F238E27FC236}">
+                <a16:creationId xmlns:a16="http://schemas.microsoft.com/office/drawing/2014/main" id="{EEC75D28-21D8-46FA-B239-E307DEF591CB}"/>
+              </a:ext>
+            </a:extLst>
+          </p:cNvPr>
+          <p:cNvSpPr>
+            <a:spLocks noGrp="1"/>
+          </p:cNvSpPr>
+          <p:nvPr>
+            <p:ph type="title"/>
+          </p:nvPr>
+        </p:nvSpPr>
+        <p:spPr>
+          <a:xfrm>
+            <a:off x="838200" y="170330"/>
+            <a:ext cx="10515600" cy="762000"/>
+          </a:xfrm>
+        </p:spPr>
+        <p:txBody>
+          <a:bodyPr/>
+          <a:lstStyle/>
+          <a:p>
+            <a:pPr algn="ctr"/>
+            <a:r>
+              <a:rPr lang="ru-RU" dirty="0">
+                <a:latin typeface="Times New Roman" panose="02020603050405020304" pitchFamily="18" charset="0"/>
+                <a:cs typeface="Times New Roman" panose="02020603050405020304" pitchFamily="18" charset="0"/>
+              </a:rPr>
+              <a:t>Ожидаемые результаты</a:t>
+            </a:r>
+          </a:p>
+        </p:txBody>
+      </p:sp>
+      <p:sp>
+        <p:nvSpPr>
+          <p:cNvPr id="3" name="Объект 2">
+            <a:extLst>
+              <a:ext uri="{FF2B5EF4-FFF2-40B4-BE49-F238E27FC236}">
+                <a16:creationId xmlns:a16="http://schemas.microsoft.com/office/drawing/2014/main" id="{9F52EC69-9860-45E6-9E44-C311D1C19D5C}"/>
+              </a:ext>
+            </a:extLst>
+          </p:cNvPr>
+          <p:cNvSpPr>
+            <a:spLocks noGrp="1"/>
+          </p:cNvSpPr>
+          <p:nvPr>
+            <p:ph idx="1"/>
+          </p:nvPr>
+        </p:nvSpPr>
+        <p:spPr>
+          <a:xfrm>
+            <a:off x="838200" y="932330"/>
+            <a:ext cx="10515600" cy="5755340"/>
+          </a:xfrm>
+        </p:spPr>
+        <p:txBody>
+          <a:bodyPr anchor="ctr">
+            <a:normAutofit lnSpcReduction="10000"/>
+          </a:bodyPr>
+          <a:lstStyle/>
+          <a:p>
+            <a:pPr marL="0" indent="0">
+              <a:buNone/>
+            </a:pPr>
+            <a:r>
+              <a:rPr lang="ru-RU" dirty="0">
+                <a:latin typeface="Times New Roman" panose="02020603050405020304" pitchFamily="18" charset="0"/>
+                <a:cs typeface="Times New Roman" panose="02020603050405020304" pitchFamily="18" charset="0"/>
+              </a:rPr>
+              <a:t>1. Будет разработан и реализован в ПО формализованный алгоритм проведения экспериментов. Это позволит получать точнее и быстрее спектры ИК-люминесценции синглетного кислорода, в частности, спектры ИК-люминесценции синглетного кислорода от длины волны возбуждения лазерного импульса.</a:t>
+            </a:r>
+          </a:p>
+          <a:p>
+            <a:pPr marL="0" indent="0">
+              <a:buNone/>
+            </a:pPr>
+            <a:r>
+              <a:rPr lang="ru-RU" dirty="0">
+                <a:latin typeface="Times New Roman" panose="02020603050405020304" pitchFamily="18" charset="0"/>
+                <a:cs typeface="Times New Roman" panose="02020603050405020304" pitchFamily="18" charset="0"/>
+              </a:rPr>
+              <a:t>2. Будет разработано программное обеспечение, которое собирает данные с осциллографа и измерителя энергии и сразу проводит их обработку с помощью двух независимых методов для вычисления спектра и расчета зависимости интенсивности сигнала от энергии лазерного импульса.</a:t>
+            </a:r>
+          </a:p>
+          <a:p>
+            <a:pPr marL="0" indent="0">
+              <a:buNone/>
+            </a:pPr>
+            <a:r>
+              <a:rPr lang="ru-RU" dirty="0">
+                <a:latin typeface="Times New Roman" panose="02020603050405020304" pitchFamily="18" charset="0"/>
+                <a:cs typeface="Times New Roman" panose="02020603050405020304" pitchFamily="18" charset="0"/>
+              </a:rPr>
+              <a:t>3. Будет реализована и протестирована встроенная процедура автоматической калибровки системы на эталонном веществе или светодиоде с известными спектральными характеристиками.</a:t>
+            </a:r>
+          </a:p>
+          <a:p>
+            <a:pPr marL="0" indent="0">
+              <a:buNone/>
+            </a:pPr>
+            <a:r>
+              <a:rPr lang="ru-RU" dirty="0">
+                <a:latin typeface="Times New Roman" panose="02020603050405020304" pitchFamily="18" charset="0"/>
+                <a:cs typeface="Times New Roman" panose="02020603050405020304" pitchFamily="18" charset="0"/>
+              </a:rPr>
+              <a:t>4. Будет протестировано ПО в реальных условиях эксперимента.</a:t>
+            </a:r>
+          </a:p>
+        </p:txBody>
+      </p:sp>
+    </p:spTree>
+    <p:extLst>
+      <p:ext uri="{BB962C8B-B14F-4D97-AF65-F5344CB8AC3E}">
+        <p14:creationId xmlns:p14="http://schemas.microsoft.com/office/powerpoint/2010/main" val="3292413976"/>
+      </p:ext>
+    </p:extLst>
+  </p:cSld>
+  <p:clrMapOvr>
+    <a:masterClrMapping/>
+  </p:clrMapOvr>
+</p:sld>
+</file>
+
+<file path=ppt/slides/slide13.xml><?xml version="1.0" encoding="utf-8"?>
+<p:sld xmlns:a="http://schemas.openxmlformats.org/drawingml/2006/main" xmlns:r="http://schemas.openxmlformats.org/officeDocument/2006/relationships" xmlns:p="http://schemas.openxmlformats.org/presentationml/2006/main">
+  <p:cSld>
+    <p:spTree>
+      <p:nvGrpSpPr>
+        <p:cNvPr id="1" name=""/>
+        <p:cNvGrpSpPr/>
+        <p:nvPr/>
+      </p:nvGrpSpPr>
+      <p:grpSpPr>
+        <a:xfrm>
+          <a:off x="0" y="0"/>
+          <a:ext cx="0" cy="0"/>
+          <a:chOff x="0" y="0"/>
+          <a:chExt cx="0" cy="0"/>
+        </a:xfrm>
+      </p:grpSpPr>
+      <p:sp>
+        <p:nvSpPr>
+          <p:cNvPr id="2" name="Заголовок 1">
+            <a:extLst>
+              <a:ext uri="{FF2B5EF4-FFF2-40B4-BE49-F238E27FC236}">
                 <a16:creationId xmlns:a16="http://schemas.microsoft.com/office/drawing/2014/main" id="{8009E791-085C-4CDA-8F96-C54D1FA07C63}"/>
               </a:ext>
             </a:extLst>
@@ -4677,7 +4971,7 @@
                 <a:latin typeface="Times New Roman" panose="02020603050405020304" pitchFamily="18" charset="0"/>
                 <a:cs typeface="Times New Roman" panose="02020603050405020304" pitchFamily="18" charset="0"/>
               </a:rPr>
-              <a:t>Место:</a:t>
+              <a:t>Место прохождения практики:</a:t>
             </a:r>
             <a:r>
               <a:rPr lang="ru-RU" sz="1800" spc="150" dirty="0">
@@ -4759,7 +5053,7 @@
     </p:spTree>
     <p:extLst>
       <p:ext uri="{BB962C8B-B14F-4D97-AF65-F5344CB8AC3E}">
-        <p14:creationId xmlns:p14="http://schemas.microsoft.com/office/powerpoint/2010/main" val="4223460131"/>
+        <p14:creationId xmlns:p14="http://schemas.microsoft.com/office/powerpoint/2010/main" val="294209795"/>
       </p:ext>
     </p:extLst>
   </p:cSld>
@@ -4849,7 +5143,13 @@
           <a:bodyPr anchor="t"/>
           <a:lstStyle/>
           <a:p>
-            <a:pPr marL="0" indent="0">
+            <a:pPr marL="0" indent="450000" defTabSz="900000">
+              <a:lnSpc>
+                <a:spcPct val="100000"/>
+              </a:lnSpc>
+              <a:spcBef>
+                <a:spcPts val="0"/>
+              </a:spcBef>
               <a:buNone/>
             </a:pPr>
             <a:r>
@@ -5067,7 +5367,13 @@
           <a:bodyPr anchor="ctr"/>
           <a:lstStyle/>
           <a:p>
-            <a:pPr marL="0" indent="0">
+            <a:pPr marL="0" indent="450000" defTabSz="900000">
+              <a:lnSpc>
+                <a:spcPct val="100000"/>
+              </a:lnSpc>
+              <a:spcBef>
+                <a:spcPts val="0"/>
+              </a:spcBef>
               <a:buNone/>
             </a:pPr>
             <a:r>
@@ -5093,7 +5399,13 @@
             </a:r>
           </a:p>
           <a:p>
-            <a:pPr marL="0" indent="0">
+            <a:pPr marL="0" indent="450000" defTabSz="900000">
+              <a:lnSpc>
+                <a:spcPct val="100000"/>
+              </a:lnSpc>
+              <a:spcBef>
+                <a:spcPts val="0"/>
+              </a:spcBef>
               <a:buNone/>
             </a:pPr>
             <a:r>
@@ -5201,7 +5513,13 @@
           </a:bodyPr>
           <a:lstStyle/>
           <a:p>
-            <a:pPr marL="0" indent="0">
+            <a:pPr marL="0" indent="450000" defTabSz="900000">
+              <a:lnSpc>
+                <a:spcPct val="100000"/>
+              </a:lnSpc>
+              <a:spcBef>
+                <a:spcPts val="0"/>
+              </a:spcBef>
               <a:buNone/>
             </a:pPr>
             <a:r>
@@ -5633,129 +5951,110 @@
         </p:spPr>
         <p:txBody>
           <a:bodyPr anchor="ctr">
-            <a:normAutofit fontScale="92500" lnSpcReduction="10000"/>
+            <a:normAutofit fontScale="92500" lnSpcReduction="20000"/>
           </a:bodyPr>
           <a:lstStyle/>
           <a:p>
-            <a:pPr marL="514350" indent="-514350">
-              <a:buAutoNum type="arabicPeriod"/>
-            </a:pPr>
-            <a:r>
-              <a:rPr lang="ru-RU" dirty="0">
-                <a:latin typeface="Times New Roman" panose="02020603050405020304" pitchFamily="18" charset="0"/>
-                <a:cs typeface="Times New Roman" panose="02020603050405020304" pitchFamily="18" charset="0"/>
-              </a:rPr>
-              <a:t>Расчет спектра сигнала (интегрирование исходного сигнала):</a:t>
-            </a:r>
-          </a:p>
-          <a:p>
-            <a:pPr lvl="1"/>
-            <a:r>
-              <a:rPr lang="ru-RU" dirty="0">
-                <a:latin typeface="Times New Roman" panose="02020603050405020304" pitchFamily="18" charset="0"/>
-                <a:cs typeface="Times New Roman" panose="02020603050405020304" pitchFamily="18" charset="0"/>
-              </a:rPr>
-              <a:t>Интерактивный выбор диапазонов для сигнала и фонового шума.</a:t>
-            </a:r>
-          </a:p>
-          <a:p>
-            <a:pPr lvl="1"/>
-            <a:r>
-              <a:rPr lang="ru-RU" dirty="0">
-                <a:latin typeface="Times New Roman" panose="02020603050405020304" pitchFamily="18" charset="0"/>
-                <a:cs typeface="Times New Roman" panose="02020603050405020304" pitchFamily="18" charset="0"/>
-              </a:rPr>
-              <a:t>Анализ и вычитание фонового шума.</a:t>
-            </a:r>
-          </a:p>
-          <a:p>
-            <a:pPr lvl="1"/>
-            <a:r>
-              <a:rPr lang="ru-RU" dirty="0">
-                <a:latin typeface="Times New Roman" panose="02020603050405020304" pitchFamily="18" charset="0"/>
-                <a:cs typeface="Times New Roman" panose="02020603050405020304" pitchFamily="18" charset="0"/>
-              </a:rPr>
-              <a:t>Анализ и предобработка исходного сигнала.</a:t>
-            </a:r>
-          </a:p>
-          <a:p>
-            <a:pPr lvl="1"/>
-            <a:r>
-              <a:rPr lang="ru-RU" dirty="0">
-                <a:latin typeface="Times New Roman" panose="02020603050405020304" pitchFamily="18" charset="0"/>
-                <a:cs typeface="Times New Roman" panose="02020603050405020304" pitchFamily="18" charset="0"/>
-              </a:rPr>
-              <a:t>Интегрирования несколькими методами и достижение необходимой точности.</a:t>
-            </a:r>
-          </a:p>
-          <a:p>
             <a:pPr marL="0" indent="0">
+              <a:lnSpc>
+                <a:spcPct val="120000"/>
+              </a:lnSpc>
+              <a:spcBef>
+                <a:spcPts val="0"/>
+              </a:spcBef>
               <a:buNone/>
             </a:pPr>
             <a:r>
+              <a:rPr lang="en-US" dirty="0">
+                <a:latin typeface="Times New Roman" panose="02020603050405020304" pitchFamily="18" charset="0"/>
+                <a:cs typeface="Times New Roman" panose="02020603050405020304" pitchFamily="18" charset="0"/>
+              </a:rPr>
+              <a:t>1. </a:t>
+            </a:r>
+            <a:r>
               <a:rPr lang="ru-RU" dirty="0">
                 <a:latin typeface="Times New Roman" panose="02020603050405020304" pitchFamily="18" charset="0"/>
                 <a:cs typeface="Times New Roman" panose="02020603050405020304" pitchFamily="18" charset="0"/>
               </a:rPr>
-              <a:t>2. Аппроксимация спектра (ортогональное разложение с итеративным улучшением точности):</a:t>
-            </a:r>
-          </a:p>
-          <a:p>
-            <a:pPr lvl="1"/>
+              <a:t>Расчет спектра (интегрирование исходного сигнала):</a:t>
+            </a:r>
+          </a:p>
+          <a:p>
+            <a:pPr marL="720000" lvl="1" indent="-180000">
+              <a:lnSpc>
+                <a:spcPct val="120000"/>
+              </a:lnSpc>
+              <a:spcBef>
+                <a:spcPts val="0"/>
+              </a:spcBef>
+            </a:pPr>
             <a:r>
               <a:rPr lang="ru-RU" dirty="0">
                 <a:latin typeface="Times New Roman" panose="02020603050405020304" pitchFamily="18" charset="0"/>
                 <a:cs typeface="Times New Roman" panose="02020603050405020304" pitchFamily="18" charset="0"/>
               </a:rPr>
-              <a:t>Анализ исходного сигнала и выбор начального базиса.</a:t>
-            </a:r>
-          </a:p>
-          <a:p>
-            <a:pPr lvl="1"/>
+              <a:t>Интерактивный выбор диапазонов для сигнала и фонового шума.</a:t>
+            </a:r>
+          </a:p>
+          <a:p>
+            <a:pPr marL="720000" lvl="1" indent="-180000">
+              <a:lnSpc>
+                <a:spcPct val="120000"/>
+              </a:lnSpc>
+              <a:spcBef>
+                <a:spcPts val="0"/>
+              </a:spcBef>
+            </a:pPr>
             <a:r>
               <a:rPr lang="ru-RU" dirty="0">
                 <a:latin typeface="Times New Roman" panose="02020603050405020304" pitchFamily="18" charset="0"/>
                 <a:cs typeface="Times New Roman" panose="02020603050405020304" pitchFamily="18" charset="0"/>
               </a:rPr>
-              <a:t>Вычисление точности результата аппроксимации и более детальное разбиение участков с недопустимыми ошибками.</a:t>
-            </a:r>
-          </a:p>
-          <a:p>
-            <a:pPr lvl="1"/>
+              <a:t>Анализ и вычитание фонового шума.</a:t>
+            </a:r>
+          </a:p>
+          <a:p>
+            <a:pPr marL="720000" lvl="1" indent="-180000">
+              <a:lnSpc>
+                <a:spcPct val="120000"/>
+              </a:lnSpc>
+              <a:spcBef>
+                <a:spcPts val="0"/>
+              </a:spcBef>
+            </a:pPr>
             <a:r>
               <a:rPr lang="ru-RU" dirty="0">
                 <a:latin typeface="Times New Roman" panose="02020603050405020304" pitchFamily="18" charset="0"/>
                 <a:cs typeface="Times New Roman" panose="02020603050405020304" pitchFamily="18" charset="0"/>
               </a:rPr>
-              <a:t>Применение </a:t>
-            </a:r>
-            <a:r>
-              <a:rPr lang="ru-RU" dirty="0" err="1">
-                <a:latin typeface="Times New Roman" panose="02020603050405020304" pitchFamily="18" charset="0"/>
-                <a:cs typeface="Times New Roman" panose="02020603050405020304" pitchFamily="18" charset="0"/>
-              </a:rPr>
-              <a:t>регуляризованной</a:t>
-            </a:r>
+              <a:t>Анализ и предобработка исходного сигнала.</a:t>
+            </a:r>
+          </a:p>
+          <a:p>
+            <a:pPr marL="720000" lvl="1" indent="-180000">
+              <a:lnSpc>
+                <a:spcPct val="120000"/>
+              </a:lnSpc>
+              <a:spcBef>
+                <a:spcPts val="0"/>
+              </a:spcBef>
+            </a:pPr>
             <a:r>
               <a:rPr lang="ru-RU" dirty="0">
                 <a:latin typeface="Times New Roman" panose="02020603050405020304" pitchFamily="18" charset="0"/>
                 <a:cs typeface="Times New Roman" panose="02020603050405020304" pitchFamily="18" charset="0"/>
               </a:rPr>
-              <a:t> регрессии для оптимизации коэффициентов.</a:t>
-            </a:r>
-          </a:p>
-          <a:p>
-            <a:pPr lvl="1"/>
-            <a:r>
-              <a:rPr lang="ru-RU" dirty="0">
-                <a:latin typeface="Times New Roman" panose="02020603050405020304" pitchFamily="18" charset="0"/>
-                <a:cs typeface="Times New Roman" panose="02020603050405020304" pitchFamily="18" charset="0"/>
-              </a:rPr>
-              <a:t>Сравнение результата аппроксимации с методом интегрирования.</a:t>
+              <a:t>Интегрирования несколькими методами и достижение необходимой точности.</a:t>
             </a:r>
           </a:p>
           <a:p>
             <a:pPr marL="0" indent="0">
+              <a:lnSpc>
+                <a:spcPct val="120000"/>
+              </a:lnSpc>
+              <a:spcBef>
+                <a:spcPts val="0"/>
+              </a:spcBef>
               <a:buNone/>
             </a:pPr>
             <a:r>
@@ -5763,6 +6062,125 @@
                 <a:latin typeface="Times New Roman" panose="02020603050405020304" pitchFamily="18" charset="0"/>
                 <a:cs typeface="Times New Roman" panose="02020603050405020304" pitchFamily="18" charset="0"/>
               </a:rPr>
+              <a:t>2. Аппроксимация сигнала (разложение с итеративным улучшением точности):</a:t>
+            </a:r>
+          </a:p>
+          <a:p>
+            <a:pPr marL="720000" lvl="1" indent="-180000">
+              <a:lnSpc>
+                <a:spcPct val="120000"/>
+              </a:lnSpc>
+              <a:spcBef>
+                <a:spcPts val="0"/>
+              </a:spcBef>
+            </a:pPr>
+            <a:r>
+              <a:rPr lang="ru-RU" dirty="0">
+                <a:latin typeface="Times New Roman" panose="02020603050405020304" pitchFamily="18" charset="0"/>
+                <a:cs typeface="Times New Roman" panose="02020603050405020304" pitchFamily="18" charset="0"/>
+              </a:rPr>
+              <a:t>Расчет аппроксимированного сигнала по формуле </a:t>
+            </a:r>
+            <a:r>
+              <a:rPr lang="ru-RU" dirty="0" err="1">
+                <a:latin typeface="Times New Roman" panose="02020603050405020304" pitchFamily="18" charset="0"/>
+                <a:cs typeface="Times New Roman" panose="02020603050405020304" pitchFamily="18" charset="0"/>
+              </a:rPr>
+              <a:t>биэкспоненциальной</a:t>
+            </a:r>
+            <a:r>
+              <a:rPr lang="ru-RU" dirty="0">
+                <a:latin typeface="Times New Roman" panose="02020603050405020304" pitchFamily="18" charset="0"/>
+                <a:cs typeface="Times New Roman" panose="02020603050405020304" pitchFamily="18" charset="0"/>
+              </a:rPr>
+              <a:t> модели</a:t>
+            </a:r>
+            <a:r>
+              <a:rPr lang="en-US" dirty="0">
+                <a:latin typeface="Times New Roman" panose="02020603050405020304" pitchFamily="18" charset="0"/>
+                <a:cs typeface="Times New Roman" panose="02020603050405020304" pitchFamily="18" charset="0"/>
+              </a:rPr>
+              <a:t>.</a:t>
+            </a:r>
+            <a:endParaRPr lang="ru-RU" dirty="0">
+              <a:latin typeface="Times New Roman" panose="02020603050405020304" pitchFamily="18" charset="0"/>
+              <a:cs typeface="Times New Roman" panose="02020603050405020304" pitchFamily="18" charset="0"/>
+            </a:endParaRPr>
+          </a:p>
+          <a:p>
+            <a:pPr marL="720000" lvl="1" indent="-180000">
+              <a:lnSpc>
+                <a:spcPct val="120000"/>
+              </a:lnSpc>
+              <a:spcBef>
+                <a:spcPts val="0"/>
+              </a:spcBef>
+            </a:pPr>
+            <a:r>
+              <a:rPr lang="ru-RU" dirty="0">
+                <a:latin typeface="Times New Roman" panose="02020603050405020304" pitchFamily="18" charset="0"/>
+                <a:cs typeface="Times New Roman" panose="02020603050405020304" pitchFamily="18" charset="0"/>
+              </a:rPr>
+              <a:t>Применение</a:t>
+            </a:r>
+            <a:r>
+              <a:rPr lang="en-US" dirty="0">
+                <a:latin typeface="Times New Roman" panose="02020603050405020304" pitchFamily="18" charset="0"/>
+                <a:cs typeface="Times New Roman" panose="02020603050405020304" pitchFamily="18" charset="0"/>
+              </a:rPr>
+              <a:t> </a:t>
+            </a:r>
+            <a:r>
+              <a:rPr lang="ru-RU" dirty="0">
+                <a:latin typeface="Times New Roman" panose="02020603050405020304" pitchFamily="18" charset="0"/>
+                <a:cs typeface="Times New Roman" panose="02020603050405020304" pitchFamily="18" charset="0"/>
+              </a:rPr>
+              <a:t>метода нелинейной регрессии для оптимизации коэффициентов.</a:t>
+            </a:r>
+          </a:p>
+          <a:p>
+            <a:pPr marL="720000" lvl="1" indent="-180000">
+              <a:lnSpc>
+                <a:spcPct val="120000"/>
+              </a:lnSpc>
+              <a:spcBef>
+                <a:spcPts val="0"/>
+              </a:spcBef>
+            </a:pPr>
+            <a:r>
+              <a:rPr lang="ru-RU" dirty="0">
+                <a:latin typeface="Times New Roman" panose="02020603050405020304" pitchFamily="18" charset="0"/>
+                <a:cs typeface="Times New Roman" panose="02020603050405020304" pitchFamily="18" charset="0"/>
+              </a:rPr>
+              <a:t>Расчет спектра для результата аппроксимации и сравнение результатом для </a:t>
+            </a:r>
+            <a:r>
+              <a:rPr lang="ru-RU">
+                <a:latin typeface="Times New Roman" panose="02020603050405020304" pitchFamily="18" charset="0"/>
+                <a:cs typeface="Times New Roman" panose="02020603050405020304" pitchFamily="18" charset="0"/>
+              </a:rPr>
+              <a:t>исходного сигнала.</a:t>
+            </a:r>
+            <a:endParaRPr lang="ru-RU" dirty="0">
+              <a:latin typeface="Times New Roman" panose="02020603050405020304" pitchFamily="18" charset="0"/>
+              <a:cs typeface="Times New Roman" panose="02020603050405020304" pitchFamily="18" charset="0"/>
+            </a:endParaRPr>
+          </a:p>
+          <a:p>
+            <a:pPr marL="0" indent="0">
+              <a:lnSpc>
+                <a:spcPct val="120000"/>
+              </a:lnSpc>
+              <a:spcBef>
+                <a:spcPts val="0"/>
+              </a:spcBef>
+              <a:buNone/>
+            </a:pPr>
+            <a:r>
+              <a:rPr lang="ru-RU" dirty="0">
+                <a:latin typeface="Times New Roman" panose="02020603050405020304" pitchFamily="18" charset="0"/>
+                <a:cs typeface="Times New Roman" panose="02020603050405020304" pitchFamily="18" charset="0"/>
+              </a:rPr>
               <a:t>3. </a:t>
             </a:r>
             <a:r>
@@ -5781,7 +6199,14 @@
             </a:r>
           </a:p>
           <a:p>
-            <a:pPr lvl="1"/>
+            <a:pPr marL="720000" lvl="1" indent="-180000">
+              <a:lnSpc>
+                <a:spcPct val="110000"/>
+              </a:lnSpc>
+              <a:spcBef>
+                <a:spcPts val="0"/>
+              </a:spcBef>
+            </a:pPr>
             <a:r>
               <a:rPr lang="ru-RU" dirty="0">
                 <a:latin typeface="Times New Roman" panose="02020603050405020304" pitchFamily="18" charset="0"/>
@@ -5791,7 +6216,14 @@
             </a:r>
           </a:p>
           <a:p>
-            <a:pPr lvl="1"/>
+            <a:pPr marL="720000" lvl="1" indent="-180000">
+              <a:lnSpc>
+                <a:spcPct val="110000"/>
+              </a:lnSpc>
+              <a:spcBef>
+                <a:spcPts val="0"/>
+              </a:spcBef>
+            </a:pPr>
             <a:r>
               <a:rPr lang="ru-RU" dirty="0">
                 <a:latin typeface="Times New Roman" panose="02020603050405020304" pitchFamily="18" charset="0"/>
@@ -5864,6 +6296,1194 @@
                 <a:latin typeface="Times New Roman" panose="02020603050405020304" pitchFamily="18" charset="0"/>
                 <a:cs typeface="Times New Roman" panose="02020603050405020304" pitchFamily="18" charset="0"/>
               </a:rPr>
+              <a:t>Описание методов</a:t>
+            </a:r>
+          </a:p>
+        </p:txBody>
+      </p:sp>
+      <mc:AlternateContent xmlns:mc="http://schemas.openxmlformats.org/markup-compatibility/2006" xmlns:a14="http://schemas.microsoft.com/office/drawing/2010/main">
+        <mc:Choice Requires="a14">
+          <p:sp>
+            <p:nvSpPr>
+              <p:cNvPr id="3" name="Объект 2">
+                <a:extLst>
+                  <a:ext uri="{FF2B5EF4-FFF2-40B4-BE49-F238E27FC236}">
+                    <a16:creationId xmlns:a16="http://schemas.microsoft.com/office/drawing/2014/main" id="{9F52EC69-9860-45E6-9E44-C311D1C19D5C}"/>
+                  </a:ext>
+                </a:extLst>
+              </p:cNvPr>
+              <p:cNvSpPr>
+                <a:spLocks noGrp="1"/>
+              </p:cNvSpPr>
+              <p:nvPr>
+                <p:ph idx="1"/>
+              </p:nvPr>
+            </p:nvSpPr>
+            <p:spPr>
+              <a:xfrm>
+                <a:off x="838200" y="932330"/>
+                <a:ext cx="10515600" cy="5755340"/>
+              </a:xfrm>
+            </p:spPr>
+            <p:txBody>
+              <a:bodyPr anchor="ctr">
+                <a:normAutofit fontScale="92500" lnSpcReduction="10000"/>
+              </a:bodyPr>
+              <a:lstStyle/>
+              <a:p>
+                <a:pPr marL="0" indent="0">
+                  <a:buNone/>
+                </a:pPr>
+                <a:r>
+                  <a:rPr lang="ru-RU" dirty="0">
+                    <a:latin typeface="Times New Roman" panose="02020603050405020304" pitchFamily="18" charset="0"/>
+                    <a:cs typeface="Times New Roman" panose="02020603050405020304" pitchFamily="18" charset="0"/>
+                  </a:rPr>
+                  <a:t>Б</a:t>
+                </a:r>
+                <a:r>
+                  <a:rPr lang="ru-RU" dirty="0" err="1">
+                    <a:latin typeface="Times New Roman" panose="02020603050405020304" pitchFamily="18" charset="0"/>
+                    <a:cs typeface="Times New Roman" panose="02020603050405020304" pitchFamily="18" charset="0"/>
+                  </a:rPr>
+                  <a:t>иэкспоненциальная</a:t>
+                </a:r>
+                <a:r>
+                  <a:rPr lang="ru-RU" dirty="0">
+                    <a:latin typeface="Times New Roman" panose="02020603050405020304" pitchFamily="18" charset="0"/>
+                    <a:cs typeface="Times New Roman" panose="02020603050405020304" pitchFamily="18" charset="0"/>
+                  </a:rPr>
+                  <a:t> модель:</a:t>
+                </a:r>
+                <a:endParaRPr lang="en-US" dirty="0">
+                  <a:latin typeface="Times New Roman" panose="02020603050405020304" pitchFamily="18" charset="0"/>
+                  <a:cs typeface="Times New Roman" panose="02020603050405020304" pitchFamily="18" charset="0"/>
+                </a:endParaRPr>
+              </a:p>
+              <a:p>
+                <a:pPr marL="720000" lvl="1" indent="-180000">
+                  <a:lnSpc>
+                    <a:spcPct val="100000"/>
+                  </a:lnSpc>
+                  <a:spcBef>
+                    <a:spcPts val="0"/>
+                  </a:spcBef>
+                  <a:spcAft>
+                    <a:spcPts val="1800"/>
+                  </a:spcAft>
+                </a:pPr>
+                <a:r>
+                  <a:rPr lang="ru-RU" sz="2200" dirty="0">
+                    <a:latin typeface="Times New Roman" panose="02020603050405020304" pitchFamily="18" charset="0"/>
+                    <a:cs typeface="Times New Roman" panose="02020603050405020304" pitchFamily="18" charset="0"/>
+                  </a:rPr>
+                  <a:t>Основная формула:</a:t>
+                </a:r>
+              </a:p>
+              <a:p>
+                <a:pPr marL="900000" indent="0" defTabSz="900000">
+                  <a:lnSpc>
+                    <a:spcPct val="100000"/>
+                  </a:lnSpc>
+                  <a:spcBef>
+                    <a:spcPts val="0"/>
+                  </a:spcBef>
+                  <a:spcAft>
+                    <a:spcPts val="1800"/>
+                  </a:spcAft>
+                  <a:buNone/>
+                </a:pPr>
+                <a14:m>
+                  <m:oMathPara xmlns:m="http://schemas.openxmlformats.org/officeDocument/2006/math">
+                    <m:oMathParaPr>
+                      <m:jc m:val="left"/>
+                    </m:oMathParaPr>
+                    <m:oMath xmlns:m="http://schemas.openxmlformats.org/officeDocument/2006/math">
+                      <m:r>
+                        <a:rPr lang="en-US" sz="2400" b="0" i="1" smtClean="0">
+                          <a:latin typeface="Cambria Math" panose="02040503050406030204" pitchFamily="18" charset="0"/>
+                          <a:cs typeface="Times New Roman" panose="02020603050405020304" pitchFamily="18" charset="0"/>
+                        </a:rPr>
+                        <m:t>𝑓</m:t>
+                      </m:r>
+                      <m:d>
+                        <m:dPr>
+                          <m:ctrlPr>
+                            <a:rPr lang="en-US" sz="2400" b="0" i="1" smtClean="0">
+                              <a:latin typeface="Cambria Math" panose="02040503050406030204" pitchFamily="18" charset="0"/>
+                              <a:cs typeface="Times New Roman" panose="02020603050405020304" pitchFamily="18" charset="0"/>
+                            </a:rPr>
+                          </m:ctrlPr>
+                        </m:dPr>
+                        <m:e>
+                          <m:r>
+                            <a:rPr lang="en-US" sz="2400" b="0" i="1" smtClean="0">
+                              <a:latin typeface="Cambria Math" panose="02040503050406030204" pitchFamily="18" charset="0"/>
+                              <a:cs typeface="Times New Roman" panose="02020603050405020304" pitchFamily="18" charset="0"/>
+                            </a:rPr>
+                            <m:t>𝑡</m:t>
+                          </m:r>
+                        </m:e>
+                      </m:d>
+                      <m:r>
+                        <a:rPr lang="en-US" sz="2400" b="0" i="1" smtClean="0">
+                          <a:latin typeface="Cambria Math" panose="02040503050406030204" pitchFamily="18" charset="0"/>
+                          <a:cs typeface="Times New Roman" panose="02020603050405020304" pitchFamily="18" charset="0"/>
+                        </a:rPr>
+                        <m:t>=</m:t>
+                      </m:r>
+                      <m:r>
+                        <a:rPr lang="en-US" sz="2400" b="0" i="1" smtClean="0">
+                          <a:latin typeface="Cambria Math" panose="02040503050406030204" pitchFamily="18" charset="0"/>
+                          <a:cs typeface="Times New Roman" panose="02020603050405020304" pitchFamily="18" charset="0"/>
+                        </a:rPr>
+                        <m:t>𝐴</m:t>
+                      </m:r>
+                      <m:f>
+                        <m:fPr>
+                          <m:ctrlPr>
+                            <a:rPr lang="en-US" sz="2400" b="0" i="1" smtClean="0">
+                              <a:latin typeface="Cambria Math" panose="02040503050406030204" pitchFamily="18" charset="0"/>
+                              <a:ea typeface="Cambria Math" panose="02040503050406030204" pitchFamily="18" charset="0"/>
+                              <a:cs typeface="Times New Roman" panose="02020603050405020304" pitchFamily="18" charset="0"/>
+                            </a:rPr>
+                          </m:ctrlPr>
+                        </m:fPr>
+                        <m:num>
+                          <m:sSub>
+                            <m:sSubPr>
+                              <m:ctrlPr>
+                                <a:rPr lang="en-US" sz="2400" b="0" i="1" smtClean="0">
+                                  <a:latin typeface="Cambria Math" panose="02040503050406030204" pitchFamily="18" charset="0"/>
+                                  <a:ea typeface="Cambria Math" panose="02040503050406030204" pitchFamily="18" charset="0"/>
+                                  <a:cs typeface="Times New Roman" panose="02020603050405020304" pitchFamily="18" charset="0"/>
+                                </a:rPr>
+                              </m:ctrlPr>
+                            </m:sSubPr>
+                            <m:e>
+                              <m:r>
+                                <a:rPr lang="en-US" sz="2400" b="0" i="1" smtClean="0">
+                                  <a:latin typeface="Cambria Math" panose="02040503050406030204" pitchFamily="18" charset="0"/>
+                                  <a:ea typeface="Cambria Math" panose="02040503050406030204" pitchFamily="18" charset="0"/>
+                                  <a:cs typeface="Times New Roman" panose="02020603050405020304" pitchFamily="18" charset="0"/>
+                                </a:rPr>
+                                <m:t>𝑘</m:t>
+                              </m:r>
+                            </m:e>
+                            <m:sub>
+                              <m:r>
+                                <a:rPr lang="en-US" sz="2400" b="0" i="1" smtClean="0">
+                                  <a:latin typeface="Cambria Math" panose="02040503050406030204" pitchFamily="18" charset="0"/>
+                                  <a:ea typeface="Cambria Math" panose="02040503050406030204" pitchFamily="18" charset="0"/>
+                                  <a:cs typeface="Times New Roman" panose="02020603050405020304" pitchFamily="18" charset="0"/>
+                                </a:rPr>
+                                <m:t>1</m:t>
+                              </m:r>
+                            </m:sub>
+                          </m:sSub>
+                        </m:num>
+                        <m:den>
+                          <m:sSub>
+                            <m:sSubPr>
+                              <m:ctrlPr>
+                                <a:rPr lang="en-US" sz="2400" b="0" i="1" smtClean="0">
+                                  <a:latin typeface="Cambria Math" panose="02040503050406030204" pitchFamily="18" charset="0"/>
+                                  <a:ea typeface="Cambria Math" panose="02040503050406030204" pitchFamily="18" charset="0"/>
+                                  <a:cs typeface="Times New Roman" panose="02020603050405020304" pitchFamily="18" charset="0"/>
+                                </a:rPr>
+                              </m:ctrlPr>
+                            </m:sSubPr>
+                            <m:e>
+                              <m:r>
+                                <a:rPr lang="en-US" sz="2400" b="0" i="1" smtClean="0">
+                                  <a:latin typeface="Cambria Math" panose="02040503050406030204" pitchFamily="18" charset="0"/>
+                                  <a:ea typeface="Cambria Math" panose="02040503050406030204" pitchFamily="18" charset="0"/>
+                                  <a:cs typeface="Times New Roman" panose="02020603050405020304" pitchFamily="18" charset="0"/>
+                                </a:rPr>
+                                <m:t>𝑘</m:t>
+                              </m:r>
+                            </m:e>
+                            <m:sub>
+                              <m:r>
+                                <a:rPr lang="en-US" sz="2400" b="0" i="1" smtClean="0">
+                                  <a:latin typeface="Cambria Math" panose="02040503050406030204" pitchFamily="18" charset="0"/>
+                                  <a:ea typeface="Cambria Math" panose="02040503050406030204" pitchFamily="18" charset="0"/>
+                                  <a:cs typeface="Times New Roman" panose="02020603050405020304" pitchFamily="18" charset="0"/>
+                                </a:rPr>
+                                <m:t>2</m:t>
+                              </m:r>
+                            </m:sub>
+                          </m:sSub>
+                          <m:r>
+                            <a:rPr lang="en-US" sz="2400" b="0" i="1" smtClean="0">
+                              <a:latin typeface="Cambria Math" panose="02040503050406030204" pitchFamily="18" charset="0"/>
+                              <a:ea typeface="Cambria Math" panose="02040503050406030204" pitchFamily="18" charset="0"/>
+                              <a:cs typeface="Times New Roman" panose="02020603050405020304" pitchFamily="18" charset="0"/>
+                            </a:rPr>
+                            <m:t>−</m:t>
+                          </m:r>
+                          <m:sSub>
+                            <m:sSubPr>
+                              <m:ctrlPr>
+                                <a:rPr lang="en-US" sz="2400" b="0" i="1" smtClean="0">
+                                  <a:latin typeface="Cambria Math" panose="02040503050406030204" pitchFamily="18" charset="0"/>
+                                  <a:ea typeface="Cambria Math" panose="02040503050406030204" pitchFamily="18" charset="0"/>
+                                  <a:cs typeface="Times New Roman" panose="02020603050405020304" pitchFamily="18" charset="0"/>
+                                </a:rPr>
+                              </m:ctrlPr>
+                            </m:sSubPr>
+                            <m:e>
+                              <m:r>
+                                <a:rPr lang="en-US" sz="2400" b="0" i="1" smtClean="0">
+                                  <a:latin typeface="Cambria Math" panose="02040503050406030204" pitchFamily="18" charset="0"/>
+                                  <a:ea typeface="Cambria Math" panose="02040503050406030204" pitchFamily="18" charset="0"/>
+                                  <a:cs typeface="Times New Roman" panose="02020603050405020304" pitchFamily="18" charset="0"/>
+                                </a:rPr>
+                                <m:t>𝑘</m:t>
+                              </m:r>
+                            </m:e>
+                            <m:sub>
+                              <m:r>
+                                <a:rPr lang="en-US" sz="2400" b="0" i="1" smtClean="0">
+                                  <a:latin typeface="Cambria Math" panose="02040503050406030204" pitchFamily="18" charset="0"/>
+                                  <a:ea typeface="Cambria Math" panose="02040503050406030204" pitchFamily="18" charset="0"/>
+                                  <a:cs typeface="Times New Roman" panose="02020603050405020304" pitchFamily="18" charset="0"/>
+                                </a:rPr>
+                                <m:t>1</m:t>
+                              </m:r>
+                            </m:sub>
+                          </m:sSub>
+                        </m:den>
+                      </m:f>
+                      <m:d>
+                        <m:dPr>
+                          <m:ctrlPr>
+                            <a:rPr lang="en-US" sz="2400" b="0" i="1" smtClean="0">
+                              <a:latin typeface="Cambria Math" panose="02040503050406030204" pitchFamily="18" charset="0"/>
+                              <a:ea typeface="Cambria Math" panose="02040503050406030204" pitchFamily="18" charset="0"/>
+                              <a:cs typeface="Times New Roman" panose="02020603050405020304" pitchFamily="18" charset="0"/>
+                            </a:rPr>
+                          </m:ctrlPr>
+                        </m:dPr>
+                        <m:e>
+                          <m:sSup>
+                            <m:sSupPr>
+                              <m:ctrlPr>
+                                <a:rPr lang="en-US" sz="2400" b="0" i="1" smtClean="0">
+                                  <a:latin typeface="Cambria Math" panose="02040503050406030204" pitchFamily="18" charset="0"/>
+                                  <a:ea typeface="Cambria Math" panose="02040503050406030204" pitchFamily="18" charset="0"/>
+                                  <a:cs typeface="Times New Roman" panose="02020603050405020304" pitchFamily="18" charset="0"/>
+                                </a:rPr>
+                              </m:ctrlPr>
+                            </m:sSupPr>
+                            <m:e>
+                              <m:r>
+                                <a:rPr lang="en-US" sz="2400" b="0" i="1" smtClean="0">
+                                  <a:latin typeface="Cambria Math" panose="02040503050406030204" pitchFamily="18" charset="0"/>
+                                  <a:ea typeface="Cambria Math" panose="02040503050406030204" pitchFamily="18" charset="0"/>
+                                  <a:cs typeface="Times New Roman" panose="02020603050405020304" pitchFamily="18" charset="0"/>
+                                </a:rPr>
+                                <m:t>𝑒</m:t>
+                              </m:r>
+                            </m:e>
+                            <m:sup>
+                              <m:r>
+                                <a:rPr lang="en-US" sz="2400" b="0" i="1" smtClean="0">
+                                  <a:latin typeface="Cambria Math" panose="02040503050406030204" pitchFamily="18" charset="0"/>
+                                  <a:ea typeface="Cambria Math" panose="02040503050406030204" pitchFamily="18" charset="0"/>
+                                  <a:cs typeface="Times New Roman" panose="02020603050405020304" pitchFamily="18" charset="0"/>
+                                </a:rPr>
+                                <m:t>−</m:t>
+                              </m:r>
+                              <m:sSub>
+                                <m:sSubPr>
+                                  <m:ctrlPr>
+                                    <a:rPr lang="en-US" sz="2400" i="1">
+                                      <a:latin typeface="Cambria Math" panose="02040503050406030204" pitchFamily="18" charset="0"/>
+                                      <a:ea typeface="Cambria Math" panose="02040503050406030204" pitchFamily="18" charset="0"/>
+                                      <a:cs typeface="Times New Roman" panose="02020603050405020304" pitchFamily="18" charset="0"/>
+                                    </a:rPr>
+                                  </m:ctrlPr>
+                                </m:sSubPr>
+                                <m:e>
+                                  <m:r>
+                                    <a:rPr lang="en-US" sz="2400" i="1">
+                                      <a:latin typeface="Cambria Math" panose="02040503050406030204" pitchFamily="18" charset="0"/>
+                                      <a:ea typeface="Cambria Math" panose="02040503050406030204" pitchFamily="18" charset="0"/>
+                                      <a:cs typeface="Times New Roman" panose="02020603050405020304" pitchFamily="18" charset="0"/>
+                                    </a:rPr>
+                                    <m:t>𝑘</m:t>
+                                  </m:r>
+                                </m:e>
+                                <m:sub>
+                                  <m:r>
+                                    <a:rPr lang="en-US" sz="2400" i="1">
+                                      <a:latin typeface="Cambria Math" panose="02040503050406030204" pitchFamily="18" charset="0"/>
+                                      <a:ea typeface="Cambria Math" panose="02040503050406030204" pitchFamily="18" charset="0"/>
+                                      <a:cs typeface="Times New Roman" panose="02020603050405020304" pitchFamily="18" charset="0"/>
+                                    </a:rPr>
+                                    <m:t>1</m:t>
+                                  </m:r>
+                                </m:sub>
+                              </m:sSub>
+                              <m:r>
+                                <a:rPr lang="en-US" sz="2400" b="0" i="1" smtClean="0">
+                                  <a:latin typeface="Cambria Math" panose="02040503050406030204" pitchFamily="18" charset="0"/>
+                                  <a:ea typeface="Cambria Math" panose="02040503050406030204" pitchFamily="18" charset="0"/>
+                                  <a:cs typeface="Times New Roman" panose="02020603050405020304" pitchFamily="18" charset="0"/>
+                                </a:rPr>
+                                <m:t>𝑡</m:t>
+                              </m:r>
+                            </m:sup>
+                          </m:sSup>
+                          <m:r>
+                            <a:rPr lang="en-US" sz="2400" b="0" i="1" smtClean="0">
+                              <a:latin typeface="Cambria Math" panose="02040503050406030204" pitchFamily="18" charset="0"/>
+                              <a:ea typeface="Cambria Math" panose="02040503050406030204" pitchFamily="18" charset="0"/>
+                              <a:cs typeface="Times New Roman" panose="02020603050405020304" pitchFamily="18" charset="0"/>
+                            </a:rPr>
+                            <m:t>−</m:t>
+                          </m:r>
+                          <m:sSup>
+                            <m:sSupPr>
+                              <m:ctrlPr>
+                                <a:rPr lang="en-US" sz="2400" i="1">
+                                  <a:latin typeface="Cambria Math" panose="02040503050406030204" pitchFamily="18" charset="0"/>
+                                  <a:ea typeface="Cambria Math" panose="02040503050406030204" pitchFamily="18" charset="0"/>
+                                  <a:cs typeface="Times New Roman" panose="02020603050405020304" pitchFamily="18" charset="0"/>
+                                </a:rPr>
+                              </m:ctrlPr>
+                            </m:sSupPr>
+                            <m:e>
+                              <m:r>
+                                <a:rPr lang="en-US" sz="2400" i="1">
+                                  <a:latin typeface="Cambria Math" panose="02040503050406030204" pitchFamily="18" charset="0"/>
+                                  <a:ea typeface="Cambria Math" panose="02040503050406030204" pitchFamily="18" charset="0"/>
+                                  <a:cs typeface="Times New Roman" panose="02020603050405020304" pitchFamily="18" charset="0"/>
+                                </a:rPr>
+                                <m:t>𝑒</m:t>
+                              </m:r>
+                            </m:e>
+                            <m:sup>
+                              <m:r>
+                                <a:rPr lang="en-US" sz="2400" i="1">
+                                  <a:latin typeface="Cambria Math" panose="02040503050406030204" pitchFamily="18" charset="0"/>
+                                  <a:ea typeface="Cambria Math" panose="02040503050406030204" pitchFamily="18" charset="0"/>
+                                  <a:cs typeface="Times New Roman" panose="02020603050405020304" pitchFamily="18" charset="0"/>
+                                </a:rPr>
+                                <m:t>−</m:t>
+                              </m:r>
+                              <m:sSub>
+                                <m:sSubPr>
+                                  <m:ctrlPr>
+                                    <a:rPr lang="en-US" sz="2400" i="1">
+                                      <a:latin typeface="Cambria Math" panose="02040503050406030204" pitchFamily="18" charset="0"/>
+                                      <a:ea typeface="Cambria Math" panose="02040503050406030204" pitchFamily="18" charset="0"/>
+                                      <a:cs typeface="Times New Roman" panose="02020603050405020304" pitchFamily="18" charset="0"/>
+                                    </a:rPr>
+                                  </m:ctrlPr>
+                                </m:sSubPr>
+                                <m:e>
+                                  <m:r>
+                                    <a:rPr lang="en-US" sz="2400" i="1">
+                                      <a:latin typeface="Cambria Math" panose="02040503050406030204" pitchFamily="18" charset="0"/>
+                                      <a:ea typeface="Cambria Math" panose="02040503050406030204" pitchFamily="18" charset="0"/>
+                                      <a:cs typeface="Times New Roman" panose="02020603050405020304" pitchFamily="18" charset="0"/>
+                                    </a:rPr>
+                                    <m:t>𝑘</m:t>
+                                  </m:r>
+                                </m:e>
+                                <m:sub>
+                                  <m:r>
+                                    <a:rPr lang="en-US" sz="2400" b="0" i="1" smtClean="0">
+                                      <a:latin typeface="Cambria Math" panose="02040503050406030204" pitchFamily="18" charset="0"/>
+                                      <a:ea typeface="Cambria Math" panose="02040503050406030204" pitchFamily="18" charset="0"/>
+                                      <a:cs typeface="Times New Roman" panose="02020603050405020304" pitchFamily="18" charset="0"/>
+                                    </a:rPr>
+                                    <m:t>2</m:t>
+                                  </m:r>
+                                </m:sub>
+                              </m:sSub>
+                              <m:r>
+                                <a:rPr lang="en-US" sz="2400" i="1">
+                                  <a:latin typeface="Cambria Math" panose="02040503050406030204" pitchFamily="18" charset="0"/>
+                                  <a:ea typeface="Cambria Math" panose="02040503050406030204" pitchFamily="18" charset="0"/>
+                                  <a:cs typeface="Times New Roman" panose="02020603050405020304" pitchFamily="18" charset="0"/>
+                                </a:rPr>
+                                <m:t>𝑡</m:t>
+                              </m:r>
+                            </m:sup>
+                          </m:sSup>
+                        </m:e>
+                      </m:d>
+                    </m:oMath>
+                  </m:oMathPara>
+                </a14:m>
+                <a:endParaRPr lang="en-US" sz="2400" dirty="0">
+                  <a:latin typeface="Times New Roman" panose="02020603050405020304" pitchFamily="18" charset="0"/>
+                  <a:cs typeface="Times New Roman" panose="02020603050405020304" pitchFamily="18" charset="0"/>
+                </a:endParaRPr>
+              </a:p>
+              <a:p>
+                <a:pPr marL="720000" lvl="1" indent="-180000">
+                  <a:lnSpc>
+                    <a:spcPct val="100000"/>
+                  </a:lnSpc>
+                  <a:spcBef>
+                    <a:spcPts val="0"/>
+                  </a:spcBef>
+                  <a:spcAft>
+                    <a:spcPts val="1800"/>
+                  </a:spcAft>
+                </a:pPr>
+                <a:r>
+                  <a:rPr lang="ru-RU" sz="2200" dirty="0">
+                    <a:latin typeface="Times New Roman" panose="02020603050405020304" pitchFamily="18" charset="0"/>
+                    <a:cs typeface="Times New Roman" panose="02020603050405020304" pitchFamily="18" charset="0"/>
+                  </a:rPr>
+                  <a:t>Система для смещения на время отклика:</a:t>
+                </a:r>
+                <a:endParaRPr lang="en-US" sz="2200" dirty="0">
+                  <a:latin typeface="Times New Roman" panose="02020603050405020304" pitchFamily="18" charset="0"/>
+                  <a:cs typeface="Times New Roman" panose="02020603050405020304" pitchFamily="18" charset="0"/>
+                </a:endParaRPr>
+              </a:p>
+              <a:p>
+                <a:pPr marL="900000" lvl="1" indent="0" defTabSz="900000">
+                  <a:lnSpc>
+                    <a:spcPct val="100000"/>
+                  </a:lnSpc>
+                  <a:spcBef>
+                    <a:spcPts val="0"/>
+                  </a:spcBef>
+                  <a:spcAft>
+                    <a:spcPts val="1800"/>
+                  </a:spcAft>
+                  <a:buNone/>
+                </a:pPr>
+                <a14:m>
+                  <m:oMathPara xmlns:m="http://schemas.openxmlformats.org/officeDocument/2006/math">
+                    <m:oMathParaPr>
+                      <m:jc m:val="left"/>
+                    </m:oMathParaPr>
+                    <m:oMath xmlns:m="http://schemas.openxmlformats.org/officeDocument/2006/math">
+                      <m:d>
+                        <m:dPr>
+                          <m:begChr m:val="{"/>
+                          <m:endChr m:val=""/>
+                          <m:ctrlPr>
+                            <a:rPr lang="ru-RU" i="1">
+                              <a:latin typeface="Cambria Math" panose="02040503050406030204" pitchFamily="18" charset="0"/>
+                              <a:cs typeface="Times New Roman" panose="02020603050405020304" pitchFamily="18" charset="0"/>
+                            </a:rPr>
+                          </m:ctrlPr>
+                        </m:dPr>
+                        <m:e>
+                          <m:eqArr>
+                            <m:eqArrPr>
+                              <m:ctrlPr>
+                                <a:rPr lang="ru-RU" i="1">
+                                  <a:latin typeface="Cambria Math" panose="02040503050406030204" pitchFamily="18" charset="0"/>
+                                  <a:cs typeface="Times New Roman" panose="02020603050405020304" pitchFamily="18" charset="0"/>
+                                </a:rPr>
+                              </m:ctrlPr>
+                            </m:eqArrPr>
+                            <m:e>
+                              <m:r>
+                                <a:rPr lang="en-US" i="1">
+                                  <a:latin typeface="Cambria Math" panose="02040503050406030204" pitchFamily="18" charset="0"/>
+                                  <a:cs typeface="Times New Roman" panose="02020603050405020304" pitchFamily="18" charset="0"/>
+                                </a:rPr>
+                                <m:t>𝐹</m:t>
+                              </m:r>
+                              <m:d>
+                                <m:dPr>
+                                  <m:ctrlPr>
+                                    <a:rPr lang="en-US" i="1">
+                                      <a:latin typeface="Cambria Math" panose="02040503050406030204" pitchFamily="18" charset="0"/>
+                                      <a:cs typeface="Times New Roman" panose="02020603050405020304" pitchFamily="18" charset="0"/>
+                                    </a:rPr>
+                                  </m:ctrlPr>
+                                </m:dPr>
+                                <m:e>
+                                  <m:r>
+                                    <a:rPr lang="en-US" i="1">
+                                      <a:latin typeface="Cambria Math" panose="02040503050406030204" pitchFamily="18" charset="0"/>
+                                      <a:cs typeface="Times New Roman" panose="02020603050405020304" pitchFamily="18" charset="0"/>
+                                    </a:rPr>
+                                    <m:t>𝑡</m:t>
+                                  </m:r>
+                                </m:e>
+                              </m:d>
+                              <m:r>
+                                <a:rPr lang="en-US" i="1">
+                                  <a:latin typeface="Cambria Math" panose="02040503050406030204" pitchFamily="18" charset="0"/>
+                                  <a:cs typeface="Times New Roman" panose="02020603050405020304" pitchFamily="18" charset="0"/>
+                                </a:rPr>
+                                <m:t>=</m:t>
+                              </m:r>
+                              <m:sSub>
+                                <m:sSubPr>
+                                  <m:ctrlPr>
+                                    <a:rPr lang="en-US" i="1">
+                                      <a:latin typeface="Cambria Math" panose="02040503050406030204" pitchFamily="18" charset="0"/>
+                                      <a:cs typeface="Times New Roman" panose="02020603050405020304" pitchFamily="18" charset="0"/>
+                                    </a:rPr>
+                                  </m:ctrlPr>
+                                </m:sSubPr>
+                                <m:e>
+                                  <m:r>
+                                    <a:rPr lang="en-US" i="1">
+                                      <a:latin typeface="Cambria Math" panose="02040503050406030204" pitchFamily="18" charset="0"/>
+                                      <a:cs typeface="Times New Roman" panose="02020603050405020304" pitchFamily="18" charset="0"/>
+                                    </a:rPr>
+                                    <m:t>𝑦</m:t>
+                                  </m:r>
+                                </m:e>
+                                <m:sub>
+                                  <m:r>
+                                    <a:rPr lang="en-US" i="1">
+                                      <a:latin typeface="Cambria Math" panose="02040503050406030204" pitchFamily="18" charset="0"/>
+                                      <a:cs typeface="Times New Roman" panose="02020603050405020304" pitchFamily="18" charset="0"/>
+                                    </a:rPr>
+                                    <m:t>0</m:t>
+                                  </m:r>
+                                </m:sub>
+                              </m:sSub>
+                              <m:r>
+                                <a:rPr lang="en-US" i="1">
+                                  <a:latin typeface="Cambria Math" panose="02040503050406030204" pitchFamily="18" charset="0"/>
+                                  <a:cs typeface="Times New Roman" panose="02020603050405020304" pitchFamily="18" charset="0"/>
+                                </a:rPr>
+                                <m:t>+</m:t>
+                              </m:r>
+                              <m:r>
+                                <a:rPr lang="en-US" i="1">
+                                  <a:latin typeface="Cambria Math" panose="02040503050406030204" pitchFamily="18" charset="0"/>
+                                  <a:cs typeface="Times New Roman" panose="02020603050405020304" pitchFamily="18" charset="0"/>
+                                </a:rPr>
+                                <m:t>𝑓</m:t>
+                              </m:r>
+                              <m:d>
+                                <m:dPr>
+                                  <m:ctrlPr>
+                                    <a:rPr lang="en-US" i="1">
+                                      <a:latin typeface="Cambria Math" panose="02040503050406030204" pitchFamily="18" charset="0"/>
+                                      <a:cs typeface="Times New Roman" panose="02020603050405020304" pitchFamily="18" charset="0"/>
+                                    </a:rPr>
+                                  </m:ctrlPr>
+                                </m:dPr>
+                                <m:e>
+                                  <m:r>
+                                    <a:rPr lang="en-US" i="1">
+                                      <a:latin typeface="Cambria Math" panose="02040503050406030204" pitchFamily="18" charset="0"/>
+                                      <a:cs typeface="Times New Roman" panose="02020603050405020304" pitchFamily="18" charset="0"/>
+                                    </a:rPr>
+                                    <m:t>𝑡</m:t>
+                                  </m:r>
+                                  <m:r>
+                                    <a:rPr lang="en-US" i="1">
+                                      <a:latin typeface="Cambria Math" panose="02040503050406030204" pitchFamily="18" charset="0"/>
+                                      <a:cs typeface="Times New Roman" panose="02020603050405020304" pitchFamily="18" charset="0"/>
+                                    </a:rPr>
+                                    <m:t>−</m:t>
+                                  </m:r>
+                                  <m:r>
+                                    <a:rPr lang="en-US" i="1">
+                                      <a:latin typeface="Cambria Math" panose="02040503050406030204" pitchFamily="18" charset="0"/>
+                                      <a:cs typeface="Times New Roman" panose="02020603050405020304" pitchFamily="18" charset="0"/>
+                                    </a:rPr>
+                                    <m:t>𝜏</m:t>
+                                  </m:r>
+                                </m:e>
+                              </m:d>
+                              <m:r>
+                                <a:rPr lang="en-US" i="1">
+                                  <a:latin typeface="Cambria Math" panose="02040503050406030204" pitchFamily="18" charset="0"/>
+                                  <a:cs typeface="Times New Roman" panose="02020603050405020304" pitchFamily="18" charset="0"/>
+                                </a:rPr>
+                                <m:t>,  </m:t>
+                              </m:r>
+                              <m:r>
+                                <a:rPr lang="en-US" i="1">
+                                  <a:latin typeface="Cambria Math" panose="02040503050406030204" pitchFamily="18" charset="0"/>
+                                  <a:cs typeface="Times New Roman" panose="02020603050405020304" pitchFamily="18" charset="0"/>
+                                </a:rPr>
+                                <m:t>𝑡</m:t>
+                              </m:r>
+                              <m:r>
+                                <a:rPr lang="en-US" i="1">
+                                  <a:latin typeface="Cambria Math" panose="02040503050406030204" pitchFamily="18" charset="0"/>
+                                  <a:cs typeface="Times New Roman" panose="02020603050405020304" pitchFamily="18" charset="0"/>
+                                </a:rPr>
+                                <m:t>&gt;</m:t>
+                              </m:r>
+                              <m:r>
+                                <a:rPr lang="en-US" i="1">
+                                  <a:latin typeface="Cambria Math" panose="02040503050406030204" pitchFamily="18" charset="0"/>
+                                  <a:cs typeface="Times New Roman" panose="02020603050405020304" pitchFamily="18" charset="0"/>
+                                </a:rPr>
+                                <m:t>𝜏</m:t>
+                              </m:r>
+                            </m:e>
+                            <m:e>
+                              <m:r>
+                                <a:rPr lang="en-US" i="1">
+                                  <a:latin typeface="Cambria Math" panose="02040503050406030204" pitchFamily="18" charset="0"/>
+                                  <a:cs typeface="Times New Roman" panose="02020603050405020304" pitchFamily="18" charset="0"/>
+                                </a:rPr>
+                                <m:t>𝐹</m:t>
+                              </m:r>
+                              <m:d>
+                                <m:dPr>
+                                  <m:ctrlPr>
+                                    <a:rPr lang="en-US" i="1">
+                                      <a:latin typeface="Cambria Math" panose="02040503050406030204" pitchFamily="18" charset="0"/>
+                                      <a:cs typeface="Times New Roman" panose="02020603050405020304" pitchFamily="18" charset="0"/>
+                                    </a:rPr>
+                                  </m:ctrlPr>
+                                </m:dPr>
+                                <m:e>
+                                  <m:r>
+                                    <a:rPr lang="en-US" i="1">
+                                      <a:latin typeface="Cambria Math" panose="02040503050406030204" pitchFamily="18" charset="0"/>
+                                      <a:cs typeface="Times New Roman" panose="02020603050405020304" pitchFamily="18" charset="0"/>
+                                    </a:rPr>
+                                    <m:t>𝑡</m:t>
+                                  </m:r>
+                                </m:e>
+                              </m:d>
+                              <m:r>
+                                <a:rPr lang="en-US" i="1">
+                                  <a:latin typeface="Cambria Math" panose="02040503050406030204" pitchFamily="18" charset="0"/>
+                                  <a:cs typeface="Times New Roman" panose="02020603050405020304" pitchFamily="18" charset="0"/>
+                                </a:rPr>
+                                <m:t>=</m:t>
+                              </m:r>
+                              <m:sSub>
+                                <m:sSubPr>
+                                  <m:ctrlPr>
+                                    <a:rPr lang="en-US" i="1">
+                                      <a:latin typeface="Cambria Math" panose="02040503050406030204" pitchFamily="18" charset="0"/>
+                                      <a:cs typeface="Times New Roman" panose="02020603050405020304" pitchFamily="18" charset="0"/>
+                                    </a:rPr>
+                                  </m:ctrlPr>
+                                </m:sSubPr>
+                                <m:e>
+                                  <m:r>
+                                    <a:rPr lang="en-US" i="1">
+                                      <a:latin typeface="Cambria Math" panose="02040503050406030204" pitchFamily="18" charset="0"/>
+                                      <a:cs typeface="Times New Roman" panose="02020603050405020304" pitchFamily="18" charset="0"/>
+                                    </a:rPr>
+                                    <m:t>𝑦</m:t>
+                                  </m:r>
+                                </m:e>
+                                <m:sub>
+                                  <m:r>
+                                    <a:rPr lang="en-US" i="1">
+                                      <a:latin typeface="Cambria Math" panose="02040503050406030204" pitchFamily="18" charset="0"/>
+                                      <a:cs typeface="Times New Roman" panose="02020603050405020304" pitchFamily="18" charset="0"/>
+                                    </a:rPr>
+                                    <m:t>0</m:t>
+                                  </m:r>
+                                </m:sub>
+                              </m:sSub>
+                              <m:r>
+                                <a:rPr lang="en-US" i="1">
+                                  <a:latin typeface="Cambria Math" panose="02040503050406030204" pitchFamily="18" charset="0"/>
+                                  <a:cs typeface="Times New Roman" panose="02020603050405020304" pitchFamily="18" charset="0"/>
+                                </a:rPr>
+                                <m:t>,                       </m:t>
+                              </m:r>
+                              <m:r>
+                                <a:rPr lang="en-US" i="1">
+                                  <a:latin typeface="Cambria Math" panose="02040503050406030204" pitchFamily="18" charset="0"/>
+                                  <a:cs typeface="Times New Roman" panose="02020603050405020304" pitchFamily="18" charset="0"/>
+                                </a:rPr>
+                                <m:t>𝑡</m:t>
+                              </m:r>
+                              <m:r>
+                                <a:rPr lang="en-US" i="1">
+                                  <a:latin typeface="Cambria Math" panose="02040503050406030204" pitchFamily="18" charset="0"/>
+                                  <a:cs typeface="Times New Roman" panose="02020603050405020304" pitchFamily="18" charset="0"/>
+                                </a:rPr>
+                                <m:t>≤</m:t>
+                              </m:r>
+                              <m:r>
+                                <a:rPr lang="en-US" i="1">
+                                  <a:latin typeface="Cambria Math" panose="02040503050406030204" pitchFamily="18" charset="0"/>
+                                  <a:cs typeface="Times New Roman" panose="02020603050405020304" pitchFamily="18" charset="0"/>
+                                </a:rPr>
+                                <m:t>𝜏</m:t>
+                              </m:r>
+                            </m:e>
+                          </m:eqArr>
+                        </m:e>
+                      </m:d>
+                    </m:oMath>
+                  </m:oMathPara>
+                </a14:m>
+                <a:endParaRPr lang="ru-RU" i="1" dirty="0">
+                  <a:latin typeface="Times New Roman" panose="02020603050405020304" pitchFamily="18" charset="0"/>
+                  <a:cs typeface="Times New Roman" panose="02020603050405020304" pitchFamily="18" charset="0"/>
+                </a:endParaRPr>
+              </a:p>
+              <a:p>
+                <a:pPr marL="0" indent="0">
+                  <a:buNone/>
+                </a:pPr>
+                <a:r>
+                  <a:rPr lang="ru-RU" dirty="0">
+                    <a:latin typeface="Times New Roman" panose="02020603050405020304" pitchFamily="18" charset="0"/>
+                    <a:cs typeface="Times New Roman" panose="02020603050405020304" pitchFamily="18" charset="0"/>
+                  </a:rPr>
+                  <a:t>Параметры модели, которые нужно подбирать:</a:t>
+                </a:r>
+                <a:endParaRPr lang="en-US" dirty="0">
+                  <a:latin typeface="Times New Roman" panose="02020603050405020304" pitchFamily="18" charset="0"/>
+                  <a:cs typeface="Times New Roman" panose="02020603050405020304" pitchFamily="18" charset="0"/>
+                </a:endParaRPr>
+              </a:p>
+              <a:p>
+                <a:pPr marL="720000" lvl="1" indent="-180000">
+                  <a:lnSpc>
+                    <a:spcPct val="120000"/>
+                  </a:lnSpc>
+                  <a:spcBef>
+                    <a:spcPts val="0"/>
+                  </a:spcBef>
+                </a:pPr>
+                <a14:m>
+                  <m:oMath xmlns:m="http://schemas.openxmlformats.org/officeDocument/2006/math">
+                    <m:sSub>
+                      <m:sSubPr>
+                        <m:ctrlPr>
+                          <a:rPr lang="en-US" i="1">
+                            <a:latin typeface="Cambria Math" panose="02040503050406030204" pitchFamily="18" charset="0"/>
+                            <a:ea typeface="Cambria Math" panose="02040503050406030204" pitchFamily="18" charset="0"/>
+                            <a:cs typeface="Times New Roman" panose="02020603050405020304" pitchFamily="18" charset="0"/>
+                          </a:rPr>
+                        </m:ctrlPr>
+                      </m:sSubPr>
+                      <m:e>
+                        <m:r>
+                          <a:rPr lang="en-US">
+                            <a:latin typeface="Cambria Math" panose="02040503050406030204" pitchFamily="18" charset="0"/>
+                            <a:ea typeface="Cambria Math" panose="02040503050406030204" pitchFamily="18" charset="0"/>
+                            <a:cs typeface="Times New Roman" panose="02020603050405020304" pitchFamily="18" charset="0"/>
+                          </a:rPr>
+                          <m:t>𝑦</m:t>
+                        </m:r>
+                      </m:e>
+                      <m:sub>
+                        <m:r>
+                          <a:rPr lang="en-US">
+                            <a:latin typeface="Cambria Math" panose="02040503050406030204" pitchFamily="18" charset="0"/>
+                            <a:ea typeface="Cambria Math" panose="02040503050406030204" pitchFamily="18" charset="0"/>
+                            <a:cs typeface="Times New Roman" panose="02020603050405020304" pitchFamily="18" charset="0"/>
+                          </a:rPr>
+                          <m:t>0</m:t>
+                        </m:r>
+                      </m:sub>
+                    </m:sSub>
+                  </m:oMath>
+                </a14:m>
+                <a:r>
+                  <a:rPr lang="en-US" sz="2200" dirty="0">
+                    <a:latin typeface="Times New Roman" panose="02020603050405020304" pitchFamily="18" charset="0"/>
+                    <a:cs typeface="Times New Roman" panose="02020603050405020304" pitchFamily="18" charset="0"/>
+                  </a:rPr>
+                  <a:t> </a:t>
+                </a:r>
+                <a:r>
+                  <a:rPr lang="ru-RU" sz="2200" dirty="0">
+                    <a:latin typeface="Times New Roman" panose="02020603050405020304" pitchFamily="18" charset="0"/>
+                    <a:cs typeface="Times New Roman" panose="02020603050405020304" pitchFamily="18" charset="0"/>
+                  </a:rPr>
+                  <a:t>— базовый уровень.</a:t>
+                </a:r>
+              </a:p>
+              <a:p>
+                <a:pPr marL="720000" lvl="1" indent="-180000">
+                  <a:lnSpc>
+                    <a:spcPct val="120000"/>
+                  </a:lnSpc>
+                  <a:spcBef>
+                    <a:spcPts val="0"/>
+                  </a:spcBef>
+                </a:pPr>
+                <a14:m>
+                  <m:oMath xmlns:m="http://schemas.openxmlformats.org/officeDocument/2006/math">
+                    <m:r>
+                      <a:rPr lang="en-US">
+                        <a:latin typeface="Cambria Math" panose="02040503050406030204" pitchFamily="18" charset="0"/>
+                        <a:ea typeface="Cambria Math" panose="02040503050406030204" pitchFamily="18" charset="0"/>
+                        <a:cs typeface="Times New Roman" panose="02020603050405020304" pitchFamily="18" charset="0"/>
+                      </a:rPr>
+                      <m:t>𝐴</m:t>
+                    </m:r>
+                  </m:oMath>
+                </a14:m>
+                <a:r>
+                  <a:rPr lang="ru-RU" sz="2200" dirty="0">
+                    <a:latin typeface="Times New Roman" panose="02020603050405020304" pitchFamily="18" charset="0"/>
+                    <a:cs typeface="Times New Roman" panose="02020603050405020304" pitchFamily="18" charset="0"/>
+                  </a:rPr>
+                  <a:t> — амплитуда отклика.</a:t>
+                </a:r>
+              </a:p>
+              <a:p>
+                <a:pPr marL="720000" lvl="1" indent="-180000">
+                  <a:lnSpc>
+                    <a:spcPct val="120000"/>
+                  </a:lnSpc>
+                  <a:spcBef>
+                    <a:spcPts val="0"/>
+                  </a:spcBef>
+                </a:pPr>
+                <a14:m>
+                  <m:oMath xmlns:m="http://schemas.openxmlformats.org/officeDocument/2006/math">
+                    <m:sSub>
+                      <m:sSubPr>
+                        <m:ctrlPr>
+                          <a:rPr lang="en-US" i="1">
+                            <a:latin typeface="Cambria Math" panose="02040503050406030204" pitchFamily="18" charset="0"/>
+                            <a:ea typeface="Cambria Math" panose="02040503050406030204" pitchFamily="18" charset="0"/>
+                            <a:cs typeface="Times New Roman" panose="02020603050405020304" pitchFamily="18" charset="0"/>
+                          </a:rPr>
+                        </m:ctrlPr>
+                      </m:sSubPr>
+                      <m:e>
+                        <m:r>
+                          <a:rPr lang="en-US">
+                            <a:latin typeface="Cambria Math" panose="02040503050406030204" pitchFamily="18" charset="0"/>
+                            <a:ea typeface="Cambria Math" panose="02040503050406030204" pitchFamily="18" charset="0"/>
+                            <a:cs typeface="Times New Roman" panose="02020603050405020304" pitchFamily="18" charset="0"/>
+                          </a:rPr>
+                          <m:t>𝑘</m:t>
+                        </m:r>
+                      </m:e>
+                      <m:sub>
+                        <m:r>
+                          <a:rPr lang="en-US">
+                            <a:latin typeface="Cambria Math" panose="02040503050406030204" pitchFamily="18" charset="0"/>
+                            <a:ea typeface="Cambria Math" panose="02040503050406030204" pitchFamily="18" charset="0"/>
+                            <a:cs typeface="Times New Roman" panose="02020603050405020304" pitchFamily="18" charset="0"/>
+                          </a:rPr>
+                          <m:t>1</m:t>
+                        </m:r>
+                      </m:sub>
+                    </m:sSub>
+                  </m:oMath>
+                </a14:m>
+                <a:r>
+                  <a:rPr lang="ru-RU" sz="2200" dirty="0">
+                    <a:latin typeface="Times New Roman" panose="02020603050405020304" pitchFamily="18" charset="0"/>
+                    <a:cs typeface="Times New Roman" panose="02020603050405020304" pitchFamily="18" charset="0"/>
+                  </a:rPr>
+                  <a:t> — быстрая константа скорости.</a:t>
+                </a:r>
+              </a:p>
+              <a:p>
+                <a:pPr marL="720000" lvl="1" indent="-180000">
+                  <a:lnSpc>
+                    <a:spcPct val="120000"/>
+                  </a:lnSpc>
+                  <a:spcBef>
+                    <a:spcPts val="0"/>
+                  </a:spcBef>
+                </a:pPr>
+                <a14:m>
+                  <m:oMath xmlns:m="http://schemas.openxmlformats.org/officeDocument/2006/math">
+                    <m:sSub>
+                      <m:sSubPr>
+                        <m:ctrlPr>
+                          <a:rPr lang="en-US" i="1">
+                            <a:latin typeface="Cambria Math" panose="02040503050406030204" pitchFamily="18" charset="0"/>
+                            <a:ea typeface="Cambria Math" panose="02040503050406030204" pitchFamily="18" charset="0"/>
+                            <a:cs typeface="Times New Roman" panose="02020603050405020304" pitchFamily="18" charset="0"/>
+                          </a:rPr>
+                        </m:ctrlPr>
+                      </m:sSubPr>
+                      <m:e>
+                        <m:r>
+                          <a:rPr lang="en-US">
+                            <a:latin typeface="Cambria Math" panose="02040503050406030204" pitchFamily="18" charset="0"/>
+                            <a:ea typeface="Cambria Math" panose="02040503050406030204" pitchFamily="18" charset="0"/>
+                            <a:cs typeface="Times New Roman" panose="02020603050405020304" pitchFamily="18" charset="0"/>
+                          </a:rPr>
+                          <m:t>𝑘</m:t>
+                        </m:r>
+                      </m:e>
+                      <m:sub>
+                        <m:r>
+                          <a:rPr lang="en-US">
+                            <a:latin typeface="Cambria Math" panose="02040503050406030204" pitchFamily="18" charset="0"/>
+                            <a:ea typeface="Cambria Math" panose="02040503050406030204" pitchFamily="18" charset="0"/>
+                            <a:cs typeface="Times New Roman" panose="02020603050405020304" pitchFamily="18" charset="0"/>
+                          </a:rPr>
+                          <m:t>2</m:t>
+                        </m:r>
+                      </m:sub>
+                    </m:sSub>
+                  </m:oMath>
+                </a14:m>
+                <a:r>
+                  <a:rPr lang="ru-RU" sz="2200" dirty="0">
+                    <a:latin typeface="Times New Roman" panose="02020603050405020304" pitchFamily="18" charset="0"/>
+                    <a:cs typeface="Times New Roman" panose="02020603050405020304" pitchFamily="18" charset="0"/>
+                  </a:rPr>
+                  <a:t> — медленная константа скорости (</a:t>
+                </a:r>
+                <a14:m>
+                  <m:oMath xmlns:m="http://schemas.openxmlformats.org/officeDocument/2006/math">
+                    <m:sSub>
+                      <m:sSubPr>
+                        <m:ctrlPr>
+                          <a:rPr lang="en-US" i="1">
+                            <a:latin typeface="Cambria Math" panose="02040503050406030204" pitchFamily="18" charset="0"/>
+                            <a:cs typeface="Times New Roman" panose="02020603050405020304" pitchFamily="18" charset="0"/>
+                          </a:rPr>
+                        </m:ctrlPr>
+                      </m:sSubPr>
+                      <m:e>
+                        <m:r>
+                          <a:rPr lang="en-US">
+                            <a:latin typeface="Cambria Math" panose="02040503050406030204" pitchFamily="18" charset="0"/>
+                            <a:cs typeface="Times New Roman" panose="02020603050405020304" pitchFamily="18" charset="0"/>
+                          </a:rPr>
+                          <m:t>𝑘</m:t>
+                        </m:r>
+                      </m:e>
+                      <m:sub>
+                        <m:r>
+                          <a:rPr lang="en-US">
+                            <a:latin typeface="Cambria Math" panose="02040503050406030204" pitchFamily="18" charset="0"/>
+                            <a:cs typeface="Times New Roman" panose="02020603050405020304" pitchFamily="18" charset="0"/>
+                          </a:rPr>
+                          <m:t>2</m:t>
+                        </m:r>
+                      </m:sub>
+                    </m:sSub>
+                    <m:r>
+                      <a:rPr lang="en-US" b="0" i="1" smtClean="0">
+                        <a:latin typeface="Cambria Math" panose="02040503050406030204" pitchFamily="18" charset="0"/>
+                        <a:cs typeface="Times New Roman" panose="02020603050405020304" pitchFamily="18" charset="0"/>
+                      </a:rPr>
+                      <m:t>&lt;</m:t>
+                    </m:r>
+                    <m:sSub>
+                      <m:sSubPr>
+                        <m:ctrlPr>
+                          <a:rPr lang="en-US" i="1">
+                            <a:latin typeface="Cambria Math" panose="02040503050406030204" pitchFamily="18" charset="0"/>
+                            <a:cs typeface="Times New Roman" panose="02020603050405020304" pitchFamily="18" charset="0"/>
+                          </a:rPr>
+                        </m:ctrlPr>
+                      </m:sSubPr>
+                      <m:e>
+                        <m:r>
+                          <a:rPr lang="en-US">
+                            <a:latin typeface="Cambria Math" panose="02040503050406030204" pitchFamily="18" charset="0"/>
+                            <a:cs typeface="Times New Roman" panose="02020603050405020304" pitchFamily="18" charset="0"/>
+                          </a:rPr>
+                          <m:t>𝑘</m:t>
+                        </m:r>
+                      </m:e>
+                      <m:sub>
+                        <m:r>
+                          <a:rPr lang="en-US" b="0" i="0" smtClean="0">
+                            <a:latin typeface="Cambria Math" panose="02040503050406030204" pitchFamily="18" charset="0"/>
+                            <a:cs typeface="Times New Roman" panose="02020603050405020304" pitchFamily="18" charset="0"/>
+                          </a:rPr>
+                          <m:t>1</m:t>
+                        </m:r>
+                      </m:sub>
+                    </m:sSub>
+                  </m:oMath>
+                </a14:m>
+                <a:r>
+                  <a:rPr lang="ru-RU" sz="2200" dirty="0">
+                    <a:latin typeface="Times New Roman" panose="02020603050405020304" pitchFamily="18" charset="0"/>
+                    <a:cs typeface="Times New Roman" panose="02020603050405020304" pitchFamily="18" charset="0"/>
+                  </a:rPr>
+                  <a:t>).</a:t>
+                </a:r>
+              </a:p>
+              <a:p>
+                <a:pPr marL="720000" lvl="1" indent="-180000">
+                  <a:lnSpc>
+                    <a:spcPct val="120000"/>
+                  </a:lnSpc>
+                  <a:spcBef>
+                    <a:spcPts val="0"/>
+                  </a:spcBef>
+                </a:pPr>
+                <a14:m>
+                  <m:oMath xmlns:m="http://schemas.openxmlformats.org/officeDocument/2006/math">
+                    <m:r>
+                      <a:rPr lang="en-US">
+                        <a:latin typeface="Cambria Math" panose="02040503050406030204" pitchFamily="18" charset="0"/>
+                        <a:ea typeface="Cambria Math" panose="02040503050406030204" pitchFamily="18" charset="0"/>
+                        <a:cs typeface="Times New Roman" panose="02020603050405020304" pitchFamily="18" charset="0"/>
+                      </a:rPr>
+                      <m:t>𝜏</m:t>
+                    </m:r>
+                  </m:oMath>
+                </a14:m>
+                <a:r>
+                  <a:rPr lang="ru-RU" sz="2200" dirty="0">
+                    <a:latin typeface="Times New Roman" panose="02020603050405020304" pitchFamily="18" charset="0"/>
+                    <a:cs typeface="Times New Roman" panose="02020603050405020304" pitchFamily="18" charset="0"/>
+                  </a:rPr>
+                  <a:t> — время задержки начала реакции.</a:t>
+                </a:r>
+              </a:p>
+            </p:txBody>
+          </p:sp>
+        </mc:Choice>
+        <mc:Fallback xmlns="">
+          <p:sp>
+            <p:nvSpPr>
+              <p:cNvPr id="3" name="Объект 2">
+                <a:extLst>
+                  <a:ext uri="{FF2B5EF4-FFF2-40B4-BE49-F238E27FC236}">
+                    <a16:creationId xmlns:a16="http://schemas.microsoft.com/office/drawing/2014/main" id="{9F52EC69-9860-45E6-9E44-C311D1C19D5C}"/>
+                  </a:ext>
+                </a:extLst>
+              </p:cNvPr>
+              <p:cNvSpPr>
+                <a:spLocks noGrp="1" noRot="1" noChangeAspect="1" noMove="1" noResize="1" noEditPoints="1" noAdjustHandles="1" noChangeArrowheads="1" noChangeShapeType="1" noTextEdit="1"/>
+              </p:cNvSpPr>
+              <p:nvPr>
+                <p:ph idx="1"/>
+              </p:nvPr>
+            </p:nvSpPr>
+            <p:spPr>
+              <a:xfrm>
+                <a:off x="838200" y="932330"/>
+                <a:ext cx="10515600" cy="5755340"/>
+              </a:xfrm>
+              <a:blipFill>
+                <a:blip r:embed="rId2"/>
+                <a:stretch>
+                  <a:fillRect l="-1043" t="-424" b="-106"/>
+                </a:stretch>
+              </a:blipFill>
+            </p:spPr>
+            <p:txBody>
+              <a:bodyPr/>
+              <a:lstStyle/>
+              <a:p>
+                <a:r>
+                  <a:rPr lang="ru-RU">
+                    <a:noFill/>
+                  </a:rPr>
+                  <a:t> </a:t>
+                </a:r>
+              </a:p>
+            </p:txBody>
+          </p:sp>
+        </mc:Fallback>
+      </mc:AlternateContent>
+      <p:pic>
+        <p:nvPicPr>
+          <p:cNvPr id="5" name="Рисунок 4">
+            <a:extLst>
+              <a:ext uri="{FF2B5EF4-FFF2-40B4-BE49-F238E27FC236}">
+                <a16:creationId xmlns:a16="http://schemas.microsoft.com/office/drawing/2014/main" id="{F933A3C6-AB65-4268-988B-6D1DABAD4D55}"/>
+              </a:ext>
+            </a:extLst>
+          </p:cNvPr>
+          <p:cNvPicPr>
+            <a:picLocks noChangeAspect="1"/>
+          </p:cNvPicPr>
+          <p:nvPr/>
+        </p:nvPicPr>
+        <p:blipFill>
+          <a:blip r:embed="rId3">
+            <a:extLst>
+              <a:ext uri="{28A0092B-C50C-407E-A947-70E740481C1C}">
+                <a14:useLocalDpi xmlns:a14="http://schemas.microsoft.com/office/drawing/2010/main" val="0"/>
+              </a:ext>
+            </a:extLst>
+          </a:blip>
+          <a:stretch>
+            <a:fillRect/>
+          </a:stretch>
+        </p:blipFill>
+        <p:spPr>
+          <a:xfrm>
+            <a:off x="6266329" y="1228165"/>
+            <a:ext cx="5670000" cy="3240000"/>
+          </a:xfrm>
+          <a:prstGeom prst="rect">
+            <a:avLst/>
+          </a:prstGeom>
+        </p:spPr>
+      </p:pic>
+    </p:spTree>
+    <p:extLst>
+      <p:ext uri="{BB962C8B-B14F-4D97-AF65-F5344CB8AC3E}">
+        <p14:creationId xmlns:p14="http://schemas.microsoft.com/office/powerpoint/2010/main" val="2698084721"/>
+      </p:ext>
+    </p:extLst>
+  </p:cSld>
+  <p:clrMapOvr>
+    <a:masterClrMapping/>
+  </p:clrMapOvr>
+</p:sld>
+</file>
+
+<file path=ppt/slides/slide9.xml><?xml version="1.0" encoding="utf-8"?>
+<p:sld xmlns:a="http://schemas.openxmlformats.org/drawingml/2006/main" xmlns:r="http://schemas.openxmlformats.org/officeDocument/2006/relationships" xmlns:p="http://schemas.openxmlformats.org/presentationml/2006/main">
+  <p:cSld>
+    <p:spTree>
+      <p:nvGrpSpPr>
+        <p:cNvPr id="1" name=""/>
+        <p:cNvGrpSpPr/>
+        <p:nvPr/>
+      </p:nvGrpSpPr>
+      <p:grpSpPr>
+        <a:xfrm>
+          <a:off x="0" y="0"/>
+          <a:ext cx="0" cy="0"/>
+          <a:chOff x="0" y="0"/>
+          <a:chExt cx="0" cy="0"/>
+        </a:xfrm>
+      </p:grpSpPr>
+      <p:sp>
+        <p:nvSpPr>
+          <p:cNvPr id="2" name="Заголовок 1">
+            <a:extLst>
+              <a:ext uri="{FF2B5EF4-FFF2-40B4-BE49-F238E27FC236}">
+                <a16:creationId xmlns:a16="http://schemas.microsoft.com/office/drawing/2014/main" id="{EEC75D28-21D8-46FA-B239-E307DEF591CB}"/>
+              </a:ext>
+            </a:extLst>
+          </p:cNvPr>
+          <p:cNvSpPr>
+            <a:spLocks noGrp="1"/>
+          </p:cNvSpPr>
+          <p:nvPr>
+            <p:ph type="title"/>
+          </p:nvPr>
+        </p:nvSpPr>
+        <p:spPr>
+          <a:xfrm>
+            <a:off x="838200" y="170330"/>
+            <a:ext cx="10515600" cy="762000"/>
+          </a:xfrm>
+        </p:spPr>
+        <p:txBody>
+          <a:bodyPr/>
+          <a:lstStyle/>
+          <a:p>
+            <a:pPr algn="ctr"/>
+            <a:r>
+              <a:rPr lang="ru-RU" dirty="0">
+                <a:latin typeface="Times New Roman" panose="02020603050405020304" pitchFamily="18" charset="0"/>
+                <a:cs typeface="Times New Roman" panose="02020603050405020304" pitchFamily="18" charset="0"/>
+              </a:rPr>
               <a:t>Ход работы</a:t>
             </a:r>
           </a:p>
@@ -6332,249 +7952,6 @@
     <p:extLst>
       <p:ext uri="{BB962C8B-B14F-4D97-AF65-F5344CB8AC3E}">
         <p14:creationId xmlns:p14="http://schemas.microsoft.com/office/powerpoint/2010/main" val="2155345332"/>
-      </p:ext>
-    </p:extLst>
-  </p:cSld>
-  <p:clrMapOvr>
-    <a:masterClrMapping/>
-  </p:clrMapOvr>
-</p:sld>
-</file>
-
-<file path=ppt/slides/slide9.xml><?xml version="1.0" encoding="utf-8"?>
-<p:sld xmlns:a="http://schemas.openxmlformats.org/drawingml/2006/main" xmlns:r="http://schemas.openxmlformats.org/officeDocument/2006/relationships" xmlns:p="http://schemas.openxmlformats.org/presentationml/2006/main">
-  <p:cSld>
-    <p:spTree>
-      <p:nvGrpSpPr>
-        <p:cNvPr id="1" name=""/>
-        <p:cNvGrpSpPr/>
-        <p:nvPr/>
-      </p:nvGrpSpPr>
-      <p:grpSpPr>
-        <a:xfrm>
-          <a:off x="0" y="0"/>
-          <a:ext cx="0" cy="0"/>
-          <a:chOff x="0" y="0"/>
-          <a:chExt cx="0" cy="0"/>
-        </a:xfrm>
-      </p:grpSpPr>
-      <p:sp>
-        <p:nvSpPr>
-          <p:cNvPr id="2" name="Заголовок 1">
-            <a:extLst>
-              <a:ext uri="{FF2B5EF4-FFF2-40B4-BE49-F238E27FC236}">
-                <a16:creationId xmlns:a16="http://schemas.microsoft.com/office/drawing/2014/main" id="{EEC75D28-21D8-46FA-B239-E307DEF591CB}"/>
-              </a:ext>
-            </a:extLst>
-          </p:cNvPr>
-          <p:cNvSpPr>
-            <a:spLocks noGrp="1"/>
-          </p:cNvSpPr>
-          <p:nvPr>
-            <p:ph type="title"/>
-          </p:nvPr>
-        </p:nvSpPr>
-        <p:spPr>
-          <a:xfrm>
-            <a:off x="838200" y="170330"/>
-            <a:ext cx="10515600" cy="762000"/>
-          </a:xfrm>
-        </p:spPr>
-        <p:txBody>
-          <a:bodyPr/>
-          <a:lstStyle/>
-          <a:p>
-            <a:pPr algn="ctr"/>
-            <a:r>
-              <a:rPr lang="ru-RU" dirty="0">
-                <a:latin typeface="Times New Roman" panose="02020603050405020304" pitchFamily="18" charset="0"/>
-                <a:cs typeface="Times New Roman" panose="02020603050405020304" pitchFamily="18" charset="0"/>
-              </a:rPr>
-              <a:t>Ход работы</a:t>
-            </a:r>
-          </a:p>
-        </p:txBody>
-      </p:sp>
-      <p:pic>
-        <p:nvPicPr>
-          <p:cNvPr id="5" name="Рисунок 4">
-            <a:extLst>
-              <a:ext uri="{FF2B5EF4-FFF2-40B4-BE49-F238E27FC236}">
-                <a16:creationId xmlns:a16="http://schemas.microsoft.com/office/drawing/2014/main" id="{A03E2CFB-5BC8-4F81-9D4B-F02C07E62FA1}"/>
-              </a:ext>
-            </a:extLst>
-          </p:cNvPr>
-          <p:cNvPicPr>
-            <a:picLocks noChangeAspect="1"/>
-          </p:cNvPicPr>
-          <p:nvPr/>
-        </p:nvPicPr>
-        <p:blipFill>
-          <a:blip r:embed="rId2"/>
-          <a:stretch>
-            <a:fillRect/>
-          </a:stretch>
-        </p:blipFill>
-        <p:spPr>
-          <a:xfrm>
-            <a:off x="1066049" y="1147483"/>
-            <a:ext cx="4690475" cy="2520000"/>
-          </a:xfrm>
-          <a:prstGeom prst="rect">
-            <a:avLst/>
-          </a:prstGeom>
-          <a:ln w="38100" cap="sq">
-            <a:solidFill>
-              <a:srgbClr val="000000"/>
-            </a:solidFill>
-            <a:prstDash val="solid"/>
-            <a:miter lim="800000"/>
-          </a:ln>
-          <a:effectLst>
-            <a:outerShdw blurRad="50800" dist="38100" dir="2700000" algn="tl" rotWithShape="0">
-              <a:srgbClr val="000000">
-                <a:alpha val="43000"/>
-              </a:srgbClr>
-            </a:outerShdw>
-          </a:effectLst>
-        </p:spPr>
-      </p:pic>
-      <p:pic>
-        <p:nvPicPr>
-          <p:cNvPr id="7" name="Рисунок 6">
-            <a:extLst>
-              <a:ext uri="{FF2B5EF4-FFF2-40B4-BE49-F238E27FC236}">
-                <a16:creationId xmlns:a16="http://schemas.microsoft.com/office/drawing/2014/main" id="{6D23315C-8388-4183-B87B-DA1544DB9EC4}"/>
-              </a:ext>
-            </a:extLst>
-          </p:cNvPr>
-          <p:cNvPicPr>
-            <a:picLocks noChangeAspect="1"/>
-          </p:cNvPicPr>
-          <p:nvPr/>
-        </p:nvPicPr>
-        <p:blipFill>
-          <a:blip r:embed="rId3"/>
-          <a:stretch>
-            <a:fillRect/>
-          </a:stretch>
-        </p:blipFill>
-        <p:spPr>
-          <a:xfrm>
-            <a:off x="6435477" y="1147483"/>
-            <a:ext cx="4695030" cy="2520000"/>
-          </a:xfrm>
-          <a:prstGeom prst="rect">
-            <a:avLst/>
-          </a:prstGeom>
-          <a:ln w="38100" cap="sq">
-            <a:solidFill>
-              <a:srgbClr val="000000"/>
-            </a:solidFill>
-            <a:prstDash val="solid"/>
-            <a:miter lim="800000"/>
-          </a:ln>
-          <a:effectLst>
-            <a:outerShdw blurRad="50800" dist="38100" dir="2700000" algn="tl" rotWithShape="0">
-              <a:srgbClr val="000000">
-                <a:alpha val="43000"/>
-              </a:srgbClr>
-            </a:outerShdw>
-          </a:effectLst>
-        </p:spPr>
-      </p:pic>
-      <p:pic>
-        <p:nvPicPr>
-          <p:cNvPr id="9" name="Рисунок 8">
-            <a:extLst>
-              <a:ext uri="{FF2B5EF4-FFF2-40B4-BE49-F238E27FC236}">
-                <a16:creationId xmlns:a16="http://schemas.microsoft.com/office/drawing/2014/main" id="{13F3C681-CC96-4228-A404-74665FCA058D}"/>
-              </a:ext>
-            </a:extLst>
-          </p:cNvPr>
-          <p:cNvPicPr>
-            <a:picLocks noChangeAspect="1"/>
-          </p:cNvPicPr>
-          <p:nvPr/>
-        </p:nvPicPr>
-        <p:blipFill>
-          <a:blip r:embed="rId4"/>
-          <a:stretch>
-            <a:fillRect/>
-          </a:stretch>
-        </p:blipFill>
-        <p:spPr>
-          <a:xfrm>
-            <a:off x="6435477" y="4015270"/>
-            <a:ext cx="4695030" cy="2520000"/>
-          </a:xfrm>
-          <a:prstGeom prst="rect">
-            <a:avLst/>
-          </a:prstGeom>
-          <a:ln w="38100" cap="sq">
-            <a:solidFill>
-              <a:srgbClr val="000000"/>
-            </a:solidFill>
-            <a:prstDash val="solid"/>
-            <a:miter lim="800000"/>
-          </a:ln>
-          <a:effectLst>
-            <a:outerShdw blurRad="50800" dist="38100" dir="2700000" algn="tl" rotWithShape="0">
-              <a:srgbClr val="000000">
-                <a:alpha val="43000"/>
-              </a:srgbClr>
-            </a:outerShdw>
-          </a:effectLst>
-        </p:spPr>
-      </p:pic>
-      <p:pic>
-        <p:nvPicPr>
-          <p:cNvPr id="11" name="Рисунок 10">
-            <a:extLst>
-              <a:ext uri="{FF2B5EF4-FFF2-40B4-BE49-F238E27FC236}">
-                <a16:creationId xmlns:a16="http://schemas.microsoft.com/office/drawing/2014/main" id="{C414E3A1-9A02-4A3C-A3DF-E4DC824681DF}"/>
-              </a:ext>
-            </a:extLst>
-          </p:cNvPr>
-          <p:cNvPicPr>
-            <a:picLocks noChangeAspect="1"/>
-          </p:cNvPicPr>
-          <p:nvPr/>
-        </p:nvPicPr>
-        <p:blipFill>
-          <a:blip r:embed="rId5"/>
-          <a:stretch>
-            <a:fillRect/>
-          </a:stretch>
-        </p:blipFill>
-        <p:spPr>
-          <a:xfrm>
-            <a:off x="1066049" y="4015270"/>
-            <a:ext cx="4685242" cy="2520000"/>
-          </a:xfrm>
-          <a:prstGeom prst="rect">
-            <a:avLst/>
-          </a:prstGeom>
-          <a:ln w="38100" cap="sq">
-            <a:solidFill>
-              <a:srgbClr val="000000"/>
-            </a:solidFill>
-            <a:prstDash val="solid"/>
-            <a:miter lim="800000"/>
-          </a:ln>
-          <a:effectLst>
-            <a:outerShdw blurRad="50800" dist="38100" dir="2700000" algn="tl" rotWithShape="0">
-              <a:srgbClr val="000000">
-                <a:alpha val="43000"/>
-              </a:srgbClr>
-            </a:outerShdw>
-          </a:effectLst>
-        </p:spPr>
-      </p:pic>
-    </p:spTree>
-    <p:extLst>
-      <p:ext uri="{BB962C8B-B14F-4D97-AF65-F5344CB8AC3E}">
-        <p14:creationId xmlns:p14="http://schemas.microsoft.com/office/powerpoint/2010/main" val="3511736450"/>
       </p:ext>
     </p:extLst>
   </p:cSld>

--- a/Novosibirsk_State_University/Дипломная работа/Зачет.pptx
+++ b/Novosibirsk_State_University/Дипломная работа/Зачет.pptx
@@ -5527,7 +5527,7 @@
                 <a:latin typeface="Times New Roman" panose="02020603050405020304" pitchFamily="18" charset="0"/>
                 <a:cs typeface="Times New Roman" panose="02020603050405020304" pitchFamily="18" charset="0"/>
               </a:rPr>
-              <a:t>Уменьшить скорость проведения эксперимента по изучению механизмов генерации синглетного кислорода, увеличить точность вычислений.</a:t>
+              <a:t>Уменьшить время проведения эксперимента по изучению механизмов генерации синглетного кислорода, увеличить точность вычислений.</a:t>
             </a:r>
           </a:p>
         </p:txBody>

--- a/Novosibirsk_State_University/Дипломная работа/Зачет.pptx
+++ b/Novosibirsk_State_University/Дипломная работа/Зачет.pptx
@@ -283,7 +283,7 @@
           <a:p>
             <a:fld id="{0EA0B553-31EF-4B1D-9EAB-410AD6CA89D0}" type="datetimeFigureOut">
               <a:rPr lang="ru-RU" smtClean="0"/>
-              <a:t>23.12.2025</a:t>
+              <a:t>17.02.2026</a:t>
             </a:fld>
             <a:endParaRPr lang="ru-RU"/>
           </a:p>
@@ -481,7 +481,7 @@
           <a:p>
             <a:fld id="{0EA0B553-31EF-4B1D-9EAB-410AD6CA89D0}" type="datetimeFigureOut">
               <a:rPr lang="ru-RU" smtClean="0"/>
-              <a:t>23.12.2025</a:t>
+              <a:t>17.02.2026</a:t>
             </a:fld>
             <a:endParaRPr lang="ru-RU"/>
           </a:p>
@@ -689,7 +689,7 @@
           <a:p>
             <a:fld id="{0EA0B553-31EF-4B1D-9EAB-410AD6CA89D0}" type="datetimeFigureOut">
               <a:rPr lang="ru-RU" smtClean="0"/>
-              <a:t>23.12.2025</a:t>
+              <a:t>17.02.2026</a:t>
             </a:fld>
             <a:endParaRPr lang="ru-RU"/>
           </a:p>
@@ -887,7 +887,7 @@
           <a:p>
             <a:fld id="{0EA0B553-31EF-4B1D-9EAB-410AD6CA89D0}" type="datetimeFigureOut">
               <a:rPr lang="ru-RU" smtClean="0"/>
-              <a:t>23.12.2025</a:t>
+              <a:t>17.02.2026</a:t>
             </a:fld>
             <a:endParaRPr lang="ru-RU"/>
           </a:p>
@@ -1162,7 +1162,7 @@
           <a:p>
             <a:fld id="{0EA0B553-31EF-4B1D-9EAB-410AD6CA89D0}" type="datetimeFigureOut">
               <a:rPr lang="ru-RU" smtClean="0"/>
-              <a:t>23.12.2025</a:t>
+              <a:t>17.02.2026</a:t>
             </a:fld>
             <a:endParaRPr lang="ru-RU"/>
           </a:p>
@@ -1427,7 +1427,7 @@
           <a:p>
             <a:fld id="{0EA0B553-31EF-4B1D-9EAB-410AD6CA89D0}" type="datetimeFigureOut">
               <a:rPr lang="ru-RU" smtClean="0"/>
-              <a:t>23.12.2025</a:t>
+              <a:t>17.02.2026</a:t>
             </a:fld>
             <a:endParaRPr lang="ru-RU"/>
           </a:p>
@@ -1839,7 +1839,7 @@
           <a:p>
             <a:fld id="{0EA0B553-31EF-4B1D-9EAB-410AD6CA89D0}" type="datetimeFigureOut">
               <a:rPr lang="ru-RU" smtClean="0"/>
-              <a:t>23.12.2025</a:t>
+              <a:t>17.02.2026</a:t>
             </a:fld>
             <a:endParaRPr lang="ru-RU"/>
           </a:p>
@@ -1980,7 +1980,7 @@
           <a:p>
             <a:fld id="{0EA0B553-31EF-4B1D-9EAB-410AD6CA89D0}" type="datetimeFigureOut">
               <a:rPr lang="ru-RU" smtClean="0"/>
-              <a:t>23.12.2025</a:t>
+              <a:t>17.02.2026</a:t>
             </a:fld>
             <a:endParaRPr lang="ru-RU"/>
           </a:p>
@@ -2093,7 +2093,7 @@
           <a:p>
             <a:fld id="{0EA0B553-31EF-4B1D-9EAB-410AD6CA89D0}" type="datetimeFigureOut">
               <a:rPr lang="ru-RU" smtClean="0"/>
-              <a:t>23.12.2025</a:t>
+              <a:t>17.02.2026</a:t>
             </a:fld>
             <a:endParaRPr lang="ru-RU"/>
           </a:p>
@@ -2404,7 +2404,7 @@
           <a:p>
             <a:fld id="{0EA0B553-31EF-4B1D-9EAB-410AD6CA89D0}" type="datetimeFigureOut">
               <a:rPr lang="ru-RU" smtClean="0"/>
-              <a:t>23.12.2025</a:t>
+              <a:t>17.02.2026</a:t>
             </a:fld>
             <a:endParaRPr lang="ru-RU"/>
           </a:p>
@@ -2692,7 +2692,7 @@
           <a:p>
             <a:fld id="{0EA0B553-31EF-4B1D-9EAB-410AD6CA89D0}" type="datetimeFigureOut">
               <a:rPr lang="ru-RU" smtClean="0"/>
-              <a:t>23.12.2025</a:t>
+              <a:t>17.02.2026</a:t>
             </a:fld>
             <a:endParaRPr lang="ru-RU"/>
           </a:p>
@@ -2933,7 +2933,7 @@
           <a:p>
             <a:fld id="{0EA0B553-31EF-4B1D-9EAB-410AD6CA89D0}" type="datetimeFigureOut">
               <a:rPr lang="ru-RU" smtClean="0"/>
-              <a:t>23.12.2025</a:t>
+              <a:t>17.02.2026</a:t>
             </a:fld>
             <a:endParaRPr lang="ru-RU"/>
           </a:p>
@@ -3857,6 +3857,45 @@
           </a:effectLst>
         </p:spPr>
       </p:pic>
+      <p:sp>
+        <p:nvSpPr>
+          <p:cNvPr id="8" name="TextBox 7">
+            <a:extLst>
+              <a:ext uri="{FF2B5EF4-FFF2-40B4-BE49-F238E27FC236}">
+                <a16:creationId xmlns:a16="http://schemas.microsoft.com/office/drawing/2014/main" id="{480A09A6-6EDF-4C71-BD51-A9D34C22E839}"/>
+              </a:ext>
+            </a:extLst>
+          </p:cNvPr>
+          <p:cNvSpPr txBox="1"/>
+          <p:nvPr/>
+        </p:nvSpPr>
+        <p:spPr>
+          <a:xfrm>
+            <a:off x="11832000" y="6498000"/>
+            <a:ext cx="360000" cy="360000"/>
+          </a:xfrm>
+          <a:prstGeom prst="rect">
+            <a:avLst/>
+          </a:prstGeom>
+          <a:noFill/>
+        </p:spPr>
+        <p:txBody>
+          <a:bodyPr wrap="none" rtlCol="0" anchor="ctr">
+            <a:spAutoFit/>
+          </a:bodyPr>
+          <a:lstStyle/>
+          <a:p>
+            <a:pPr algn="ctr"/>
+            <a:r>
+              <a:rPr lang="ru-RU" dirty="0">
+                <a:latin typeface="Times New Roman" panose="02020603050405020304" pitchFamily="18" charset="0"/>
+                <a:cs typeface="Times New Roman" panose="02020603050405020304" pitchFamily="18" charset="0"/>
+              </a:rPr>
+              <a:t>10</a:t>
+            </a:r>
+          </a:p>
+        </p:txBody>
+      </p:sp>
     </p:spTree>
     <p:extLst>
       <p:ext uri="{BB962C8B-B14F-4D97-AF65-F5344CB8AC3E}">
@@ -4612,6 +4651,45 @@
           </a:graphicData>
         </a:graphic>
       </p:graphicFrame>
+      <p:sp>
+        <p:nvSpPr>
+          <p:cNvPr id="5" name="TextBox 4">
+            <a:extLst>
+              <a:ext uri="{FF2B5EF4-FFF2-40B4-BE49-F238E27FC236}">
+                <a16:creationId xmlns:a16="http://schemas.microsoft.com/office/drawing/2014/main" id="{7096222F-0C36-4553-A176-3B2B5FBD8E16}"/>
+              </a:ext>
+            </a:extLst>
+          </p:cNvPr>
+          <p:cNvSpPr txBox="1"/>
+          <p:nvPr/>
+        </p:nvSpPr>
+        <p:spPr>
+          <a:xfrm>
+            <a:off x="11832000" y="6498000"/>
+            <a:ext cx="360000" cy="360000"/>
+          </a:xfrm>
+          <a:prstGeom prst="rect">
+            <a:avLst/>
+          </a:prstGeom>
+          <a:noFill/>
+        </p:spPr>
+        <p:txBody>
+          <a:bodyPr wrap="none" rtlCol="0" anchor="ctr">
+            <a:spAutoFit/>
+          </a:bodyPr>
+          <a:lstStyle/>
+          <a:p>
+            <a:pPr algn="ctr"/>
+            <a:r>
+              <a:rPr lang="ru-RU" dirty="0">
+                <a:latin typeface="Times New Roman" panose="02020603050405020304" pitchFamily="18" charset="0"/>
+                <a:cs typeface="Times New Roman" panose="02020603050405020304" pitchFamily="18" charset="0"/>
+              </a:rPr>
+              <a:t>11</a:t>
+            </a:r>
+          </a:p>
+        </p:txBody>
+      </p:sp>
     </p:spTree>
     <p:extLst>
       <p:ext uri="{BB962C8B-B14F-4D97-AF65-F5344CB8AC3E}">
@@ -4756,6 +4834,45 @@
           </a:p>
         </p:txBody>
       </p:sp>
+      <p:sp>
+        <p:nvSpPr>
+          <p:cNvPr id="4" name="TextBox 3">
+            <a:extLst>
+              <a:ext uri="{FF2B5EF4-FFF2-40B4-BE49-F238E27FC236}">
+                <a16:creationId xmlns:a16="http://schemas.microsoft.com/office/drawing/2014/main" id="{DE6AA263-FE67-46A8-867D-07793C03A27B}"/>
+              </a:ext>
+            </a:extLst>
+          </p:cNvPr>
+          <p:cNvSpPr txBox="1"/>
+          <p:nvPr/>
+        </p:nvSpPr>
+        <p:spPr>
+          <a:xfrm>
+            <a:off x="11832000" y="6498000"/>
+            <a:ext cx="360000" cy="360000"/>
+          </a:xfrm>
+          <a:prstGeom prst="rect">
+            <a:avLst/>
+          </a:prstGeom>
+          <a:noFill/>
+        </p:spPr>
+        <p:txBody>
+          <a:bodyPr wrap="none" rtlCol="0" anchor="ctr">
+            <a:spAutoFit/>
+          </a:bodyPr>
+          <a:lstStyle/>
+          <a:p>
+            <a:pPr algn="ctr"/>
+            <a:r>
+              <a:rPr lang="ru-RU" dirty="0">
+                <a:latin typeface="Times New Roman" panose="02020603050405020304" pitchFamily="18" charset="0"/>
+                <a:cs typeface="Times New Roman" panose="02020603050405020304" pitchFamily="18" charset="0"/>
+              </a:rPr>
+              <a:t>12</a:t>
+            </a:r>
+          </a:p>
+        </p:txBody>
+      </p:sp>
     </p:spTree>
     <p:extLst>
       <p:ext uri="{BB962C8B-B14F-4D97-AF65-F5344CB8AC3E}">
@@ -5274,6 +5391,45 @@
           </a:prstGeom>
         </p:spPr>
       </p:pic>
+      <p:sp>
+        <p:nvSpPr>
+          <p:cNvPr id="4" name="TextBox 3">
+            <a:extLst>
+              <a:ext uri="{FF2B5EF4-FFF2-40B4-BE49-F238E27FC236}">
+                <a16:creationId xmlns:a16="http://schemas.microsoft.com/office/drawing/2014/main" id="{4D094746-1B6D-4DB2-99FA-AA61470CBBCA}"/>
+              </a:ext>
+            </a:extLst>
+          </p:cNvPr>
+          <p:cNvSpPr txBox="1"/>
+          <p:nvPr/>
+        </p:nvSpPr>
+        <p:spPr>
+          <a:xfrm>
+            <a:off x="11832000" y="6498000"/>
+            <a:ext cx="360000" cy="360000"/>
+          </a:xfrm>
+          <a:prstGeom prst="rect">
+            <a:avLst/>
+          </a:prstGeom>
+          <a:noFill/>
+        </p:spPr>
+        <p:txBody>
+          <a:bodyPr wrap="none" rtlCol="0" anchor="ctr">
+            <a:spAutoFit/>
+          </a:bodyPr>
+          <a:lstStyle/>
+          <a:p>
+            <a:pPr algn="ctr"/>
+            <a:r>
+              <a:rPr lang="ru-RU" dirty="0">
+                <a:latin typeface="Times New Roman" panose="02020603050405020304" pitchFamily="18" charset="0"/>
+                <a:cs typeface="Times New Roman" panose="02020603050405020304" pitchFamily="18" charset="0"/>
+              </a:rPr>
+              <a:t>2</a:t>
+            </a:r>
+          </a:p>
+        </p:txBody>
+      </p:sp>
     </p:spTree>
     <p:extLst>
       <p:ext uri="{BB962C8B-B14F-4D97-AF65-F5344CB8AC3E}">
@@ -5418,6 +5574,45 @@
           </a:p>
         </p:txBody>
       </p:sp>
+      <p:sp>
+        <p:nvSpPr>
+          <p:cNvPr id="4" name="TextBox 3">
+            <a:extLst>
+              <a:ext uri="{FF2B5EF4-FFF2-40B4-BE49-F238E27FC236}">
+                <a16:creationId xmlns:a16="http://schemas.microsoft.com/office/drawing/2014/main" id="{2B526DE3-EB3D-419B-8678-6B7F8FC045C7}"/>
+              </a:ext>
+            </a:extLst>
+          </p:cNvPr>
+          <p:cNvSpPr txBox="1"/>
+          <p:nvPr/>
+        </p:nvSpPr>
+        <p:spPr>
+          <a:xfrm>
+            <a:off x="11832000" y="6498000"/>
+            <a:ext cx="360000" cy="360000"/>
+          </a:xfrm>
+          <a:prstGeom prst="rect">
+            <a:avLst/>
+          </a:prstGeom>
+          <a:noFill/>
+        </p:spPr>
+        <p:txBody>
+          <a:bodyPr wrap="none" rtlCol="0" anchor="ctr">
+            <a:spAutoFit/>
+          </a:bodyPr>
+          <a:lstStyle/>
+          <a:p>
+            <a:pPr algn="ctr"/>
+            <a:r>
+              <a:rPr lang="ru-RU" dirty="0">
+                <a:latin typeface="Times New Roman" panose="02020603050405020304" pitchFamily="18" charset="0"/>
+                <a:cs typeface="Times New Roman" panose="02020603050405020304" pitchFamily="18" charset="0"/>
+              </a:rPr>
+              <a:t>3</a:t>
+            </a:r>
+          </a:p>
+        </p:txBody>
+      </p:sp>
     </p:spTree>
     <p:extLst>
       <p:ext uri="{BB962C8B-B14F-4D97-AF65-F5344CB8AC3E}">
@@ -5560,6 +5755,45 @@
           </a:prstGeom>
         </p:spPr>
       </p:pic>
+      <p:sp>
+        <p:nvSpPr>
+          <p:cNvPr id="5" name="TextBox 4">
+            <a:extLst>
+              <a:ext uri="{FF2B5EF4-FFF2-40B4-BE49-F238E27FC236}">
+                <a16:creationId xmlns:a16="http://schemas.microsoft.com/office/drawing/2014/main" id="{A562F448-D48D-44C1-A671-1B186C908B94}"/>
+              </a:ext>
+            </a:extLst>
+          </p:cNvPr>
+          <p:cNvSpPr txBox="1"/>
+          <p:nvPr/>
+        </p:nvSpPr>
+        <p:spPr>
+          <a:xfrm>
+            <a:off x="11832000" y="6498000"/>
+            <a:ext cx="360000" cy="360000"/>
+          </a:xfrm>
+          <a:prstGeom prst="rect">
+            <a:avLst/>
+          </a:prstGeom>
+          <a:noFill/>
+        </p:spPr>
+        <p:txBody>
+          <a:bodyPr wrap="none" rtlCol="0" anchor="ctr">
+            <a:spAutoFit/>
+          </a:bodyPr>
+          <a:lstStyle/>
+          <a:p>
+            <a:pPr algn="ctr"/>
+            <a:r>
+              <a:rPr lang="ru-RU" dirty="0">
+                <a:latin typeface="Times New Roman" panose="02020603050405020304" pitchFamily="18" charset="0"/>
+                <a:cs typeface="Times New Roman" panose="02020603050405020304" pitchFamily="18" charset="0"/>
+              </a:rPr>
+              <a:t>4</a:t>
+            </a:r>
+          </a:p>
+        </p:txBody>
+      </p:sp>
     </p:spTree>
     <p:extLst>
       <p:ext uri="{BB962C8B-B14F-4D97-AF65-F5344CB8AC3E}">
@@ -5732,6 +5966,45 @@
           </a:p>
         </p:txBody>
       </p:sp>
+      <p:sp>
+        <p:nvSpPr>
+          <p:cNvPr id="5" name="TextBox 4">
+            <a:extLst>
+              <a:ext uri="{FF2B5EF4-FFF2-40B4-BE49-F238E27FC236}">
+                <a16:creationId xmlns:a16="http://schemas.microsoft.com/office/drawing/2014/main" id="{9142D16C-A193-41B4-B12A-977F41731F4D}"/>
+              </a:ext>
+            </a:extLst>
+          </p:cNvPr>
+          <p:cNvSpPr txBox="1"/>
+          <p:nvPr/>
+        </p:nvSpPr>
+        <p:spPr>
+          <a:xfrm>
+            <a:off x="11832000" y="6498000"/>
+            <a:ext cx="360000" cy="360000"/>
+          </a:xfrm>
+          <a:prstGeom prst="rect">
+            <a:avLst/>
+          </a:prstGeom>
+          <a:noFill/>
+        </p:spPr>
+        <p:txBody>
+          <a:bodyPr wrap="none" rtlCol="0" anchor="ctr">
+            <a:spAutoFit/>
+          </a:bodyPr>
+          <a:lstStyle/>
+          <a:p>
+            <a:pPr algn="ctr"/>
+            <a:r>
+              <a:rPr lang="ru-RU" dirty="0">
+                <a:latin typeface="Times New Roman" panose="02020603050405020304" pitchFamily="18" charset="0"/>
+                <a:cs typeface="Times New Roman" panose="02020603050405020304" pitchFamily="18" charset="0"/>
+              </a:rPr>
+              <a:t>5</a:t>
+            </a:r>
+          </a:p>
+        </p:txBody>
+      </p:sp>
     </p:spTree>
     <p:extLst>
       <p:ext uri="{BB962C8B-B14F-4D97-AF65-F5344CB8AC3E}">
@@ -5860,6 +6133,45 @@
           </a:effectLst>
         </p:spPr>
       </p:pic>
+      <p:sp>
+        <p:nvSpPr>
+          <p:cNvPr id="4" name="TextBox 3">
+            <a:extLst>
+              <a:ext uri="{FF2B5EF4-FFF2-40B4-BE49-F238E27FC236}">
+                <a16:creationId xmlns:a16="http://schemas.microsoft.com/office/drawing/2014/main" id="{36093B7F-3320-4083-8EB2-5D57F1D189D3}"/>
+              </a:ext>
+            </a:extLst>
+          </p:cNvPr>
+          <p:cNvSpPr txBox="1"/>
+          <p:nvPr/>
+        </p:nvSpPr>
+        <p:spPr>
+          <a:xfrm>
+            <a:off x="11832000" y="6498000"/>
+            <a:ext cx="360000" cy="360000"/>
+          </a:xfrm>
+          <a:prstGeom prst="rect">
+            <a:avLst/>
+          </a:prstGeom>
+          <a:noFill/>
+        </p:spPr>
+        <p:txBody>
+          <a:bodyPr wrap="none" rtlCol="0" anchor="ctr">
+            <a:spAutoFit/>
+          </a:bodyPr>
+          <a:lstStyle/>
+          <a:p>
+            <a:pPr algn="ctr"/>
+            <a:r>
+              <a:rPr lang="ru-RU" dirty="0">
+                <a:latin typeface="Times New Roman" panose="02020603050405020304" pitchFamily="18" charset="0"/>
+                <a:cs typeface="Times New Roman" panose="02020603050405020304" pitchFamily="18" charset="0"/>
+              </a:rPr>
+              <a:t>6</a:t>
+            </a:r>
+          </a:p>
+        </p:txBody>
+      </p:sp>
     </p:spTree>
     <p:extLst>
       <p:ext uri="{BB962C8B-B14F-4D97-AF65-F5344CB8AC3E}">
@@ -6230,6 +6542,45 @@
                 <a:cs typeface="Times New Roman" panose="02020603050405020304" pitchFamily="18" charset="0"/>
               </a:rPr>
               <a:t>Калибровка и проверка работоспособности всех компонент через обратную связь и сохранение калибровочных коэффициентов.</a:t>
+            </a:r>
+          </a:p>
+        </p:txBody>
+      </p:sp>
+      <p:sp>
+        <p:nvSpPr>
+          <p:cNvPr id="4" name="TextBox 3">
+            <a:extLst>
+              <a:ext uri="{FF2B5EF4-FFF2-40B4-BE49-F238E27FC236}">
+                <a16:creationId xmlns:a16="http://schemas.microsoft.com/office/drawing/2014/main" id="{0C8BF1B0-E201-4347-AD40-612404CFB76A}"/>
+              </a:ext>
+            </a:extLst>
+          </p:cNvPr>
+          <p:cNvSpPr txBox="1"/>
+          <p:nvPr/>
+        </p:nvSpPr>
+        <p:spPr>
+          <a:xfrm>
+            <a:off x="11832000" y="6498000"/>
+            <a:ext cx="360000" cy="360000"/>
+          </a:xfrm>
+          <a:prstGeom prst="rect">
+            <a:avLst/>
+          </a:prstGeom>
+          <a:noFill/>
+        </p:spPr>
+        <p:txBody>
+          <a:bodyPr wrap="none" rtlCol="0" anchor="ctr">
+            <a:spAutoFit/>
+          </a:bodyPr>
+          <a:lstStyle/>
+          <a:p>
+            <a:pPr algn="ctr"/>
+            <a:r>
+              <a:rPr lang="ru-RU" dirty="0">
+                <a:latin typeface="Times New Roman" panose="02020603050405020304" pitchFamily="18" charset="0"/>
+                <a:cs typeface="Times New Roman" panose="02020603050405020304" pitchFamily="18" charset="0"/>
+              </a:rPr>
+              <a:t>7</a:t>
             </a:r>
           </a:p>
         </p:txBody>
@@ -7422,6 +7773,45 @@
           </a:prstGeom>
         </p:spPr>
       </p:pic>
+      <p:sp>
+        <p:nvSpPr>
+          <p:cNvPr id="6" name="TextBox 5">
+            <a:extLst>
+              <a:ext uri="{FF2B5EF4-FFF2-40B4-BE49-F238E27FC236}">
+                <a16:creationId xmlns:a16="http://schemas.microsoft.com/office/drawing/2014/main" id="{7D9E4156-1262-4F63-828A-40AEB6976DA0}"/>
+              </a:ext>
+            </a:extLst>
+          </p:cNvPr>
+          <p:cNvSpPr txBox="1"/>
+          <p:nvPr/>
+        </p:nvSpPr>
+        <p:spPr>
+          <a:xfrm>
+            <a:off x="11833504" y="6498000"/>
+            <a:ext cx="360000" cy="360000"/>
+          </a:xfrm>
+          <a:prstGeom prst="rect">
+            <a:avLst/>
+          </a:prstGeom>
+          <a:noFill/>
+        </p:spPr>
+        <p:txBody>
+          <a:bodyPr wrap="none" rtlCol="0" anchor="ctr">
+            <a:spAutoFit/>
+          </a:bodyPr>
+          <a:lstStyle/>
+          <a:p>
+            <a:pPr algn="ctr"/>
+            <a:r>
+              <a:rPr lang="ru-RU" dirty="0">
+                <a:latin typeface="Times New Roman" panose="02020603050405020304" pitchFamily="18" charset="0"/>
+                <a:cs typeface="Times New Roman" panose="02020603050405020304" pitchFamily="18" charset="0"/>
+              </a:rPr>
+              <a:t>8</a:t>
+            </a:r>
+          </a:p>
+        </p:txBody>
+      </p:sp>
     </p:spTree>
     <p:extLst>
       <p:ext uri="{BB962C8B-B14F-4D97-AF65-F5344CB8AC3E}">
@@ -7948,6 +8338,45 @@
           </a:prstGeom>
         </p:spPr>
       </p:pic>
+      <p:sp>
+        <p:nvSpPr>
+          <p:cNvPr id="14" name="TextBox 13">
+            <a:extLst>
+              <a:ext uri="{FF2B5EF4-FFF2-40B4-BE49-F238E27FC236}">
+                <a16:creationId xmlns:a16="http://schemas.microsoft.com/office/drawing/2014/main" id="{42E9B689-BE69-4F05-97EC-09530EA536DD}"/>
+              </a:ext>
+            </a:extLst>
+          </p:cNvPr>
+          <p:cNvSpPr txBox="1"/>
+          <p:nvPr/>
+        </p:nvSpPr>
+        <p:spPr>
+          <a:xfrm>
+            <a:off x="11832000" y="6498000"/>
+            <a:ext cx="360000" cy="360000"/>
+          </a:xfrm>
+          <a:prstGeom prst="rect">
+            <a:avLst/>
+          </a:prstGeom>
+          <a:noFill/>
+        </p:spPr>
+        <p:txBody>
+          <a:bodyPr wrap="none" rtlCol="0" anchor="ctr">
+            <a:spAutoFit/>
+          </a:bodyPr>
+          <a:lstStyle/>
+          <a:p>
+            <a:pPr algn="ctr"/>
+            <a:r>
+              <a:rPr lang="ru-RU" dirty="0">
+                <a:latin typeface="Times New Roman" panose="02020603050405020304" pitchFamily="18" charset="0"/>
+                <a:cs typeface="Times New Roman" panose="02020603050405020304" pitchFamily="18" charset="0"/>
+              </a:rPr>
+              <a:t>9</a:t>
+            </a:r>
+          </a:p>
+        </p:txBody>
+      </p:sp>
     </p:spTree>
     <p:extLst>
       <p:ext uri="{BB962C8B-B14F-4D97-AF65-F5344CB8AC3E}">

--- a/Novosibirsk_State_University/Дипломная работа/Зачет.pptx
+++ b/Novosibirsk_State_University/Дипломная работа/Зачет.pptx
@@ -283,7 +283,7 @@
           <a:p>
             <a:fld id="{0EA0B553-31EF-4B1D-9EAB-410AD6CA89D0}" type="datetimeFigureOut">
               <a:rPr lang="ru-RU" smtClean="0"/>
-              <a:t>17.02.2026</a:t>
+              <a:t>24.02.2026</a:t>
             </a:fld>
             <a:endParaRPr lang="ru-RU"/>
           </a:p>
@@ -481,7 +481,7 @@
           <a:p>
             <a:fld id="{0EA0B553-31EF-4B1D-9EAB-410AD6CA89D0}" type="datetimeFigureOut">
               <a:rPr lang="ru-RU" smtClean="0"/>
-              <a:t>17.02.2026</a:t>
+              <a:t>24.02.2026</a:t>
             </a:fld>
             <a:endParaRPr lang="ru-RU"/>
           </a:p>
@@ -689,7 +689,7 @@
           <a:p>
             <a:fld id="{0EA0B553-31EF-4B1D-9EAB-410AD6CA89D0}" type="datetimeFigureOut">
               <a:rPr lang="ru-RU" smtClean="0"/>
-              <a:t>17.02.2026</a:t>
+              <a:t>24.02.2026</a:t>
             </a:fld>
             <a:endParaRPr lang="ru-RU"/>
           </a:p>
@@ -887,7 +887,7 @@
           <a:p>
             <a:fld id="{0EA0B553-31EF-4B1D-9EAB-410AD6CA89D0}" type="datetimeFigureOut">
               <a:rPr lang="ru-RU" smtClean="0"/>
-              <a:t>17.02.2026</a:t>
+              <a:t>24.02.2026</a:t>
             </a:fld>
             <a:endParaRPr lang="ru-RU"/>
           </a:p>
@@ -1162,7 +1162,7 @@
           <a:p>
             <a:fld id="{0EA0B553-31EF-4B1D-9EAB-410AD6CA89D0}" type="datetimeFigureOut">
               <a:rPr lang="ru-RU" smtClean="0"/>
-              <a:t>17.02.2026</a:t>
+              <a:t>24.02.2026</a:t>
             </a:fld>
             <a:endParaRPr lang="ru-RU"/>
           </a:p>
@@ -1427,7 +1427,7 @@
           <a:p>
             <a:fld id="{0EA0B553-31EF-4B1D-9EAB-410AD6CA89D0}" type="datetimeFigureOut">
               <a:rPr lang="ru-RU" smtClean="0"/>
-              <a:t>17.02.2026</a:t>
+              <a:t>24.02.2026</a:t>
             </a:fld>
             <a:endParaRPr lang="ru-RU"/>
           </a:p>
@@ -1839,7 +1839,7 @@
           <a:p>
             <a:fld id="{0EA0B553-31EF-4B1D-9EAB-410AD6CA89D0}" type="datetimeFigureOut">
               <a:rPr lang="ru-RU" smtClean="0"/>
-              <a:t>17.02.2026</a:t>
+              <a:t>24.02.2026</a:t>
             </a:fld>
             <a:endParaRPr lang="ru-RU"/>
           </a:p>
@@ -1980,7 +1980,7 @@
           <a:p>
             <a:fld id="{0EA0B553-31EF-4B1D-9EAB-410AD6CA89D0}" type="datetimeFigureOut">
               <a:rPr lang="ru-RU" smtClean="0"/>
-              <a:t>17.02.2026</a:t>
+              <a:t>24.02.2026</a:t>
             </a:fld>
             <a:endParaRPr lang="ru-RU"/>
           </a:p>
@@ -2093,7 +2093,7 @@
           <a:p>
             <a:fld id="{0EA0B553-31EF-4B1D-9EAB-410AD6CA89D0}" type="datetimeFigureOut">
               <a:rPr lang="ru-RU" smtClean="0"/>
-              <a:t>17.02.2026</a:t>
+              <a:t>24.02.2026</a:t>
             </a:fld>
             <a:endParaRPr lang="ru-RU"/>
           </a:p>
@@ -2404,7 +2404,7 @@
           <a:p>
             <a:fld id="{0EA0B553-31EF-4B1D-9EAB-410AD6CA89D0}" type="datetimeFigureOut">
               <a:rPr lang="ru-RU" smtClean="0"/>
-              <a:t>17.02.2026</a:t>
+              <a:t>24.02.2026</a:t>
             </a:fld>
             <a:endParaRPr lang="ru-RU"/>
           </a:p>
@@ -2692,7 +2692,7 @@
           <a:p>
             <a:fld id="{0EA0B553-31EF-4B1D-9EAB-410AD6CA89D0}" type="datetimeFigureOut">
               <a:rPr lang="ru-RU" smtClean="0"/>
-              <a:t>17.02.2026</a:t>
+              <a:t>24.02.2026</a:t>
             </a:fld>
             <a:endParaRPr lang="ru-RU"/>
           </a:p>
@@ -2933,7 +2933,7 @@
           <a:p>
             <a:fld id="{0EA0B553-31EF-4B1D-9EAB-410AD6CA89D0}" type="datetimeFigureOut">
               <a:rPr lang="ru-RU" smtClean="0"/>
-              <a:t>17.02.2026</a:t>
+              <a:t>24.02.2026</a:t>
             </a:fld>
             <a:endParaRPr lang="ru-RU"/>
           </a:p>
@@ -4785,7 +4785,7 @@
           </a:bodyPr>
           <a:lstStyle/>
           <a:p>
-            <a:pPr marL="0" indent="0">
+            <a:pPr marL="0" indent="0" algn="just">
               <a:buNone/>
             </a:pPr>
             <a:r>
@@ -4797,7 +4797,7 @@
             </a:r>
           </a:p>
           <a:p>
-            <a:pPr marL="0" indent="0">
+            <a:pPr marL="0" indent="0" algn="just">
               <a:buNone/>
             </a:pPr>
             <a:r>
@@ -4809,7 +4809,7 @@
             </a:r>
           </a:p>
           <a:p>
-            <a:pPr marL="0" indent="0">
+            <a:pPr marL="0" indent="0" algn="just">
               <a:buNone/>
             </a:pPr>
             <a:r>
@@ -4821,7 +4821,7 @@
             </a:r>
           </a:p>
           <a:p>
-            <a:pPr marL="0" indent="0">
+            <a:pPr marL="0" indent="0" algn="just">
               <a:buNone/>
             </a:pPr>
             <a:r>
@@ -5260,7 +5260,7 @@
           <a:bodyPr anchor="t"/>
           <a:lstStyle/>
           <a:p>
-            <a:pPr marL="0" indent="450000" defTabSz="900000">
+            <a:pPr marL="0" indent="450000" algn="just" defTabSz="900000">
               <a:lnSpc>
                 <a:spcPct val="100000"/>
               </a:lnSpc>
@@ -5523,7 +5523,7 @@
           <a:bodyPr anchor="ctr"/>
           <a:lstStyle/>
           <a:p>
-            <a:pPr marL="0" indent="450000" defTabSz="900000">
+            <a:pPr marL="0" indent="450000" algn="just" defTabSz="900000">
               <a:lnSpc>
                 <a:spcPct val="100000"/>
               </a:lnSpc>
@@ -5555,7 +5555,7 @@
             </a:r>
           </a:p>
           <a:p>
-            <a:pPr marL="0" indent="450000" defTabSz="900000">
+            <a:pPr marL="0" indent="450000" algn="just" defTabSz="900000">
               <a:lnSpc>
                 <a:spcPct val="100000"/>
               </a:lnSpc>
@@ -5708,7 +5708,7 @@
           </a:bodyPr>
           <a:lstStyle/>
           <a:p>
-            <a:pPr marL="0" indent="450000" defTabSz="900000">
+            <a:pPr marL="0" indent="450000" algn="just" defTabSz="900000">
               <a:lnSpc>
                 <a:spcPct val="100000"/>
               </a:lnSpc>
@@ -5889,7 +5889,7 @@
           </a:bodyPr>
           <a:lstStyle/>
           <a:p>
-            <a:pPr marL="0" indent="0">
+            <a:pPr marL="0" indent="0" algn="just">
               <a:buNone/>
             </a:pPr>
             <a:r>
@@ -5901,7 +5901,7 @@
             </a:r>
           </a:p>
           <a:p>
-            <a:pPr marL="0" indent="0">
+            <a:pPr marL="0" indent="0" algn="just">
               <a:buNone/>
             </a:pPr>
             <a:r>
@@ -5913,7 +5913,7 @@
             </a:r>
           </a:p>
           <a:p>
-            <a:pPr marL="0" indent="0">
+            <a:pPr marL="0" indent="0" algn="just">
               <a:buNone/>
             </a:pPr>
             <a:r>
@@ -5953,7 +5953,7 @@
             </a:r>
           </a:p>
           <a:p>
-            <a:pPr marL="0" indent="0">
+            <a:pPr marL="0" indent="0" algn="just">
               <a:buNone/>
             </a:pPr>
             <a:r>
@@ -6267,7 +6267,7 @@
           </a:bodyPr>
           <a:lstStyle/>
           <a:p>
-            <a:pPr marL="0" indent="0">
+            <a:pPr marL="0" indent="0" algn="just">
               <a:lnSpc>
                 <a:spcPct val="120000"/>
               </a:lnSpc>
@@ -6292,7 +6292,7 @@
             </a:r>
           </a:p>
           <a:p>
-            <a:pPr marL="720000" lvl="1" indent="-180000">
+            <a:pPr marL="720000" lvl="1" indent="-180000" algn="just">
               <a:lnSpc>
                 <a:spcPct val="120000"/>
               </a:lnSpc>
@@ -6309,7 +6309,7 @@
             </a:r>
           </a:p>
           <a:p>
-            <a:pPr marL="720000" lvl="1" indent="-180000">
+            <a:pPr marL="720000" lvl="1" indent="-180000" algn="just">
               <a:lnSpc>
                 <a:spcPct val="120000"/>
               </a:lnSpc>
@@ -6326,7 +6326,7 @@
             </a:r>
           </a:p>
           <a:p>
-            <a:pPr marL="720000" lvl="1" indent="-180000">
+            <a:pPr marL="720000" lvl="1" indent="-180000" algn="just">
               <a:lnSpc>
                 <a:spcPct val="120000"/>
               </a:lnSpc>
@@ -6343,7 +6343,7 @@
             </a:r>
           </a:p>
           <a:p>
-            <a:pPr marL="720000" lvl="1" indent="-180000">
+            <a:pPr marL="720000" lvl="1" indent="-180000" algn="just">
               <a:lnSpc>
                 <a:spcPct val="120000"/>
               </a:lnSpc>
@@ -6360,7 +6360,7 @@
             </a:r>
           </a:p>
           <a:p>
-            <a:pPr marL="0" indent="0">
+            <a:pPr marL="0" indent="0" algn="just">
               <a:lnSpc>
                 <a:spcPct val="120000"/>
               </a:lnSpc>
@@ -6378,7 +6378,7 @@
             </a:r>
           </a:p>
           <a:p>
-            <a:pPr marL="720000" lvl="1" indent="-180000">
+            <a:pPr marL="720000" lvl="1" indent="-180000" algn="just">
               <a:lnSpc>
                 <a:spcPct val="120000"/>
               </a:lnSpc>
@@ -6420,7 +6420,7 @@
             </a:endParaRPr>
           </a:p>
           <a:p>
-            <a:pPr marL="720000" lvl="1" indent="-180000">
+            <a:pPr marL="720000" lvl="1" indent="-180000" algn="just">
               <a:lnSpc>
                 <a:spcPct val="120000"/>
               </a:lnSpc>
@@ -6451,7 +6451,7 @@
             </a:r>
           </a:p>
           <a:p>
-            <a:pPr marL="720000" lvl="1" indent="-180000">
+            <a:pPr marL="720000" lvl="1" indent="-180000" algn="just">
               <a:lnSpc>
                 <a:spcPct val="120000"/>
               </a:lnSpc>
@@ -6464,22 +6464,11 @@
                 <a:latin typeface="Times New Roman" panose="02020603050405020304" pitchFamily="18" charset="0"/>
                 <a:cs typeface="Times New Roman" panose="02020603050405020304" pitchFamily="18" charset="0"/>
               </a:rPr>
-              <a:t>Расчет спектра для результата аппроксимации и сравнение результатом для </a:t>
-            </a:r>
-            <a:r>
-              <a:rPr lang="ru-RU">
-                <a:latin typeface="Times New Roman" panose="02020603050405020304" pitchFamily="18" charset="0"/>
-                <a:cs typeface="Times New Roman" panose="02020603050405020304" pitchFamily="18" charset="0"/>
-              </a:rPr>
-              <a:t>исходного сигнала.</a:t>
-            </a:r>
-            <a:endParaRPr lang="ru-RU" dirty="0">
-              <a:latin typeface="Times New Roman" panose="02020603050405020304" pitchFamily="18" charset="0"/>
-              <a:cs typeface="Times New Roman" panose="02020603050405020304" pitchFamily="18" charset="0"/>
-            </a:endParaRPr>
-          </a:p>
-          <a:p>
-            <a:pPr marL="0" indent="0">
+              <a:t>Расчет спектра для результата аппроксимации и сравнение результатом для исходного сигнала.</a:t>
+            </a:r>
+          </a:p>
+          <a:p>
+            <a:pPr marL="0" indent="0" algn="just">
               <a:lnSpc>
                 <a:spcPct val="120000"/>
               </a:lnSpc>
@@ -6511,7 +6500,7 @@
             </a:r>
           </a:p>
           <a:p>
-            <a:pPr marL="720000" lvl="1" indent="-180000">
+            <a:pPr marL="720000" lvl="1" indent="-180000" algn="just">
               <a:lnSpc>
                 <a:spcPct val="110000"/>
               </a:lnSpc>
@@ -6528,7 +6517,7 @@
             </a:r>
           </a:p>
           <a:p>
-            <a:pPr marL="720000" lvl="1" indent="-180000">
+            <a:pPr marL="720000" lvl="1" indent="-180000" algn="just">
               <a:lnSpc>
                 <a:spcPct val="110000"/>
               </a:lnSpc>
@@ -6652,8 +6641,8 @@
           </a:p>
         </p:txBody>
       </p:sp>
-      <mc:AlternateContent xmlns:mc="http://schemas.openxmlformats.org/markup-compatibility/2006" xmlns:a14="http://schemas.microsoft.com/office/drawing/2010/main">
-        <mc:Choice Requires="a14">
+      <mc:AlternateContent xmlns:mc="http://schemas.openxmlformats.org/markup-compatibility/2006">
+        <mc:Choice xmlns:a14="http://schemas.microsoft.com/office/drawing/2010/main" Requires="a14">
           <p:sp>
             <p:nvSpPr>
               <p:cNvPr id="3" name="Объект 2">
@@ -6682,7 +6671,7 @@
               </a:bodyPr>
               <a:lstStyle/>
               <a:p>
-                <a:pPr marL="0" indent="0">
+                <a:pPr marL="0" indent="0" algn="just">
                   <a:buNone/>
                 </a:pPr>
                 <a:r>
@@ -6712,7 +6701,7 @@
                 </a:endParaRPr>
               </a:p>
               <a:p>
-                <a:pPr marL="720000" lvl="1" indent="-180000">
+                <a:pPr marL="720000" lvl="1" indent="-180000" algn="just">
                   <a:lnSpc>
                     <a:spcPct val="100000"/>
                   </a:lnSpc>
@@ -6732,7 +6721,7 @@
                 </a:r>
               </a:p>
               <a:p>
-                <a:pPr marL="900000" indent="0" defTabSz="900000">
+                <a:pPr marL="900000" indent="0" algn="just" defTabSz="900000">
                   <a:lnSpc>
                     <a:spcPct val="100000"/>
                   </a:lnSpc>
@@ -7076,7 +7065,7 @@
                 </a:endParaRPr>
               </a:p>
               <a:p>
-                <a:pPr marL="720000" lvl="1" indent="-180000">
+                <a:pPr marL="720000" lvl="1" indent="-180000" algn="just">
                   <a:lnSpc>
                     <a:spcPct val="100000"/>
                   </a:lnSpc>
@@ -7100,7 +7089,7 @@
                 </a:endParaRPr>
               </a:p>
               <a:p>
-                <a:pPr marL="900000" lvl="1" indent="0" defTabSz="900000">
+                <a:pPr marL="900000" lvl="1" indent="0" algn="just" defTabSz="900000">
                   <a:lnSpc>
                     <a:spcPct val="100000"/>
                   </a:lnSpc>
@@ -7380,7 +7369,7 @@
                 </a:endParaRPr>
               </a:p>
               <a:p>
-                <a:pPr marL="0" indent="0">
+                <a:pPr marL="0" indent="0" algn="just">
                   <a:buNone/>
                 </a:pPr>
                 <a:r>
@@ -7396,7 +7385,7 @@
                 </a:endParaRPr>
               </a:p>
               <a:p>
-                <a:pPr marL="720000" lvl="1" indent="-180000">
+                <a:pPr marL="720000" lvl="1" indent="-180000" algn="just">
                   <a:lnSpc>
                     <a:spcPct val="120000"/>
                   </a:lnSpc>
@@ -7455,7 +7444,7 @@
                 </a:r>
               </a:p>
               <a:p>
-                <a:pPr marL="720000" lvl="1" indent="-180000">
+                <a:pPr marL="720000" lvl="1" indent="-180000" algn="just">
                   <a:lnSpc>
                     <a:spcPct val="120000"/>
                   </a:lnSpc>
@@ -7484,7 +7473,7 @@
                 </a:r>
               </a:p>
               <a:p>
-                <a:pPr marL="720000" lvl="1" indent="-180000">
+                <a:pPr marL="720000" lvl="1" indent="-180000" algn="just">
                   <a:lnSpc>
                     <a:spcPct val="120000"/>
                   </a:lnSpc>
@@ -7536,7 +7525,7 @@
                 </a:r>
               </a:p>
               <a:p>
-                <a:pPr marL="720000" lvl="1" indent="-180000">
+                <a:pPr marL="720000" lvl="1" indent="-180000" algn="just">
                   <a:lnSpc>
                     <a:spcPct val="120000"/>
                   </a:lnSpc>
@@ -7662,7 +7651,7 @@
                 </a:r>
               </a:p>
               <a:p>
-                <a:pPr marL="720000" lvl="1" indent="-180000">
+                <a:pPr marL="720000" lvl="1" indent="-180000" algn="just">
                   <a:lnSpc>
                     <a:spcPct val="120000"/>
                   </a:lnSpc>
@@ -7693,7 +7682,7 @@
             </p:txBody>
           </p:sp>
         </mc:Choice>
-        <mc:Fallback xmlns="">
+        <mc:Fallback>
           <p:sp>
             <p:nvSpPr>
               <p:cNvPr id="3" name="Объект 2">
